--- a/First_Review_R2.pptx
+++ b/First_Review_R2.pptx
@@ -3302,8 +3302,12 @@
                 <a:ea typeface="Arial" pitchFamily="34" charset="-122"/>
                 <a:cs typeface="Arial" pitchFamily="34" charset="-120"/>
               </a:rPr>
-              <a:t>18/03/2026</a:t>
-            </a:r>
+              <a:t>17/04/2026</a:t>
+            </a:r>
+            <a:endParaRPr lang="en-US" sz="850" dirty="0"/>
+          </a:p>
+          <a:p>
+            <a:pPr algn="r"/>
             <a:endParaRPr lang="en-US" sz="850" dirty="0"/>
           </a:p>
           <a:p>
@@ -3361,8 +3365,8 @@
         </p:nvSpPr>
         <p:spPr>
           <a:xfrm>
-            <a:off x="194767" y="694944"/>
-            <a:ext cx="8686800" cy="3886200"/>
+            <a:off x="272489" y="612648"/>
+            <a:ext cx="8609077" cy="3968496"/>
           </a:xfrm>
           <a:prstGeom prst="rect">
             <a:avLst/>
@@ -3382,7 +3386,7 @@
               <a:buChar char="•"/>
             </a:pPr>
             <a:r>
-              <a:rPr lang="en-US" sz="1200" dirty="0">
+              <a:rPr lang="en-US" sz="1600" dirty="0">
                 <a:solidFill>
                   <a:srgbClr val="1F1F1F"/>
                 </a:solidFill>
@@ -3392,7 +3396,7 @@
               </a:rPr>
               <a:t>Design and implement a multi-agent AI framework to automatically detect security vulnerabilities in Infrastructure-as-Code (IaC) templates.</a:t>
             </a:r>
-            <a:endParaRPr lang="en-US" sz="1200" dirty="0"/>
+            <a:endParaRPr lang="en-US" sz="1600" dirty="0"/>
           </a:p>
           <a:p>
             <a:pPr marL="342900" indent="-342900">
@@ -3403,7 +3407,7 @@
               <a:buChar char="•"/>
             </a:pPr>
             <a:r>
-              <a:rPr lang="en-US" sz="1200" dirty="0">
+              <a:rPr lang="en-US" sz="1600" dirty="0">
                 <a:solidFill>
                   <a:srgbClr val="1F1F1F"/>
                 </a:solidFill>
@@ -3413,7 +3417,7 @@
               </a:rPr>
               <a:t>Overcome the limitations of traditional static analysis tools by using Retrieval-Augmented Generation (RAG) to identify context-specific misconfigurations and reduce false positives.</a:t>
             </a:r>
-            <a:endParaRPr lang="en-US" sz="1200" dirty="0"/>
+            <a:endParaRPr lang="en-US" sz="1600" dirty="0"/>
           </a:p>
           <a:p>
             <a:pPr marL="342900" indent="-342900">
@@ -3424,7 +3428,7 @@
               <a:buChar char="•"/>
             </a:pPr>
             <a:r>
-              <a:rPr lang="en-US" sz="1200" dirty="0">
+              <a:rPr lang="en-US" sz="1600" dirty="0">
                 <a:solidFill>
                   <a:srgbClr val="1F1F1F"/>
                 </a:solidFill>
@@ -3434,7 +3438,7 @@
               </a:rPr>
               <a:t>Build a structured Vulnerability Detection Agent that invokes Amazon Bedrock (Claude 3.5 Sonnet V2) with an enriched context (parsed template summary + retrieved CIS Benchmark snippets) and returns findings as structured JSON.</a:t>
             </a:r>
-            <a:endParaRPr lang="en-US" sz="1200" dirty="0"/>
+            <a:endParaRPr lang="en-US" sz="1600" dirty="0"/>
           </a:p>
           <a:p>
             <a:pPr marL="342900" indent="-342900">
@@ -3445,7 +3449,7 @@
               <a:buChar char="•"/>
             </a:pPr>
             <a:r>
-              <a:rPr lang="en-US" sz="1200" dirty="0">
+              <a:rPr lang="en-US" sz="1600" dirty="0">
                 <a:solidFill>
                   <a:srgbClr val="1F1F1F"/>
                 </a:solidFill>
@@ -3455,7 +3459,7 @@
               </a:rPr>
               <a:t>Generate automated, actionable remediation guidance for each finding, referencing specific CloudFormation properties and AWS security documentation.</a:t>
             </a:r>
-            <a:endParaRPr lang="en-US" sz="1200" dirty="0"/>
+            <a:endParaRPr lang="en-US" sz="1600" dirty="0"/>
           </a:p>
           <a:p>
             <a:pPr marL="342900" indent="-342900">
@@ -3466,7 +3470,7 @@
               <a:buChar char="•"/>
             </a:pPr>
             <a:r>
-              <a:rPr lang="en-US" sz="1200" dirty="0">
+              <a:rPr lang="en-US" sz="1600" dirty="0">
                 <a:solidFill>
                   <a:srgbClr val="1F1F1F"/>
                 </a:solidFill>
@@ -3476,7 +3480,7 @@
               </a:rPr>
               <a:t>Provide automated and actionable remediation guidance that integrates smoothly with CI/CD workflows (GitHub Actions, GitLab CI, Jenkins), reduces manual effort, and improves overall cloud security scalability.</a:t>
             </a:r>
-            <a:endParaRPr lang="en-US" sz="1200" dirty="0"/>
+            <a:endParaRPr lang="en-US" sz="1600" dirty="0"/>
           </a:p>
         </p:txBody>
       </p:sp>
@@ -3648,7 +3652,7 @@
         </p:nvSpPr>
         <p:spPr>
           <a:xfrm>
-            <a:off x="7744968" y="4636008"/>
+            <a:off x="7699248" y="4954089"/>
             <a:ext cx="1371600" cy="164592"/>
           </a:xfrm>
           <a:prstGeom prst="rect">
@@ -3662,61 +3666,21 @@
           <a:lstStyle/>
           <a:p>
             <a:pPr algn="r"/>
-            <a:endParaRPr lang="en-US" sz="850" dirty="0">
-              <a:solidFill>
-                <a:srgbClr val="000000"/>
-              </a:solidFill>
-              <a:latin typeface="Arial" pitchFamily="34" charset="0"/>
-              <a:ea typeface="Arial" pitchFamily="34" charset="-122"/>
-              <a:cs typeface="Arial" pitchFamily="34" charset="-120"/>
-            </a:endParaRPr>
+            <a:r>
+              <a:rPr lang="en-US" sz="850" dirty="0">
+                <a:solidFill>
+                  <a:srgbClr val="000000"/>
+                </a:solidFill>
+                <a:latin typeface="Arial" pitchFamily="34" charset="0"/>
+                <a:ea typeface="Arial" pitchFamily="34" charset="-122"/>
+                <a:cs typeface="Arial" pitchFamily="34" charset="-120"/>
+              </a:rPr>
+              <a:t>17/04/2026</a:t>
+            </a:r>
+            <a:endParaRPr lang="en-US" sz="850" dirty="0"/>
           </a:p>
           <a:p>
             <a:pPr algn="r"/>
-            <a:endParaRPr lang="en-US" sz="850" dirty="0">
-              <a:solidFill>
-                <a:srgbClr val="000000"/>
-              </a:solidFill>
-              <a:latin typeface="Arial" pitchFamily="34" charset="0"/>
-              <a:ea typeface="Arial" pitchFamily="34" charset="-122"/>
-              <a:cs typeface="Arial" pitchFamily="34" charset="-120"/>
-            </a:endParaRPr>
-          </a:p>
-          <a:p>
-            <a:pPr algn="r"/>
-            <a:endParaRPr lang="en-US" sz="850" dirty="0">
-              <a:solidFill>
-                <a:srgbClr val="000000"/>
-              </a:solidFill>
-              <a:latin typeface="Arial" pitchFamily="34" charset="0"/>
-              <a:ea typeface="Arial" pitchFamily="34" charset="-122"/>
-              <a:cs typeface="Arial" pitchFamily="34" charset="-120"/>
-            </a:endParaRPr>
-          </a:p>
-          <a:p>
-            <a:pPr algn="r"/>
-            <a:endParaRPr lang="en-US" sz="850" dirty="0">
-              <a:solidFill>
-                <a:srgbClr val="000000"/>
-              </a:solidFill>
-              <a:latin typeface="Arial" pitchFamily="34" charset="0"/>
-              <a:ea typeface="Arial" pitchFamily="34" charset="-122"/>
-              <a:cs typeface="Arial" pitchFamily="34" charset="-120"/>
-            </a:endParaRPr>
-          </a:p>
-          <a:p>
-            <a:pPr algn="r"/>
-            <a:r>
-              <a:rPr lang="en-US" sz="850" dirty="0">
-                <a:solidFill>
-                  <a:srgbClr val="000000"/>
-                </a:solidFill>
-                <a:latin typeface="Arial" pitchFamily="34" charset="0"/>
-                <a:ea typeface="Arial" pitchFamily="34" charset="-122"/>
-                <a:cs typeface="Arial" pitchFamily="34" charset="-120"/>
-              </a:rPr>
-              <a:t>18/03/2026</a:t>
-            </a:r>
             <a:endParaRPr lang="en-US" sz="850" dirty="0"/>
           </a:p>
           <a:p>
@@ -3775,14 +3739,14 @@
           <p:nvPr>
             <p:extLst>
               <p:ext uri="{D42A27DB-BD31-4B8C-83A1-F6EECF244321}">
-                <p14:modId xmlns:p14="http://schemas.microsoft.com/office/powerpoint/2010/main" val="1579011935"/>
+                <p14:modId xmlns:p14="http://schemas.microsoft.com/office/powerpoint/2010/main" val="1409681358"/>
               </p:ext>
             </p:extLst>
           </p:nvPr>
         </p:nvGraphicFramePr>
         <p:xfrm>
-          <a:off x="194767" y="649224"/>
-          <a:ext cx="8686800" cy="4069080"/>
+          <a:off x="194767" y="590286"/>
+          <a:ext cx="8686800" cy="4058941"/>
         </p:xfrm>
         <a:graphic>
           <a:graphicData uri="http://schemas.openxmlformats.org/drawingml/2006/table">
@@ -3818,7 +3782,7 @@
                   </a:extLst>
                 </a:gridCol>
               </a:tblGrid>
-              <a:tr h="508635">
+              <a:tr h="498496">
                 <a:tc>
                   <a:txBody>
                     <a:bodyPr/>
@@ -6245,8 +6209,12 @@
                 <a:ea typeface="Arial" pitchFamily="34" charset="-122"/>
                 <a:cs typeface="Arial" pitchFamily="34" charset="-120"/>
               </a:rPr>
-              <a:t>18/03/2026</a:t>
-            </a:r>
+              <a:t>17/04/2026</a:t>
+            </a:r>
+            <a:endParaRPr lang="en-US" sz="850" dirty="0"/>
+          </a:p>
+          <a:p>
+            <a:pPr algn="r"/>
             <a:endParaRPr lang="en-US" sz="850" dirty="0"/>
           </a:p>
           <a:p>
@@ -6956,21 +6924,6 @@
           <a:bodyPr wrap="square" lIns="0" tIns="0" rIns="0" bIns="0" rtlCol="0" anchor="ctr"/>
           <a:lstStyle/>
           <a:p>
-            <a:pPr algn="r"/>
-            <a:r>
-              <a:rPr lang="en-US" sz="850" dirty="0">
-                <a:solidFill>
-                  <a:srgbClr val="000000"/>
-                </a:solidFill>
-                <a:latin typeface="Arial" pitchFamily="34" charset="0"/>
-                <a:ea typeface="Arial" pitchFamily="34" charset="-122"/>
-                <a:cs typeface="Arial" pitchFamily="34" charset="-120"/>
-              </a:rPr>
-              <a:t>18/03/2026</a:t>
-            </a:r>
-            <a:endParaRPr lang="en-US" sz="850" dirty="0"/>
-          </a:p>
-          <a:p>
             <a:pPr marL="0" indent="0" algn="r">
               <a:buNone/>
             </a:pPr>
@@ -7041,6 +6994,55 @@
           </a:prstGeom>
         </p:spPr>
       </p:pic>
+      <p:sp>
+        <p:nvSpPr>
+          <p:cNvPr id="9" name="Text 3">
+            <a:extLst>
+              <a:ext uri="{FF2B5EF4-FFF2-40B4-BE49-F238E27FC236}">
+                <a16:creationId xmlns:a16="http://schemas.microsoft.com/office/drawing/2014/main" id="{0D79A555-ED41-30C2-15C4-F2C84BF4269C}"/>
+              </a:ext>
+            </a:extLst>
+          </p:cNvPr>
+          <p:cNvSpPr/>
+          <p:nvPr/>
+        </p:nvSpPr>
+        <p:spPr>
+          <a:xfrm>
+            <a:off x="7650721" y="4788408"/>
+            <a:ext cx="1371600" cy="164592"/>
+          </a:xfrm>
+          <a:prstGeom prst="rect">
+            <a:avLst/>
+          </a:prstGeom>
+          <a:noFill/>
+          <a:ln/>
+        </p:spPr>
+        <p:txBody>
+          <a:bodyPr wrap="square" lIns="0" tIns="0" rIns="0" bIns="0" rtlCol="0" anchor="ctr"/>
+          <a:lstStyle/>
+          <a:p>
+            <a:pPr algn="r"/>
+            <a:r>
+              <a:rPr lang="en-US" sz="850" dirty="0">
+                <a:solidFill>
+                  <a:srgbClr val="000000"/>
+                </a:solidFill>
+                <a:latin typeface="Arial" pitchFamily="34" charset="0"/>
+                <a:ea typeface="Arial" pitchFamily="34" charset="-122"/>
+                <a:cs typeface="Arial" pitchFamily="34" charset="-120"/>
+              </a:rPr>
+              <a:t>17/04/2026</a:t>
+            </a:r>
+            <a:endParaRPr lang="en-US" sz="850" dirty="0"/>
+          </a:p>
+          <a:p>
+            <a:pPr marL="0" indent="0" algn="r">
+              <a:buNone/>
+            </a:pPr>
+            <a:endParaRPr lang="en-US" sz="850" dirty="0"/>
+          </a:p>
+        </p:txBody>
+      </p:sp>
     </p:spTree>
   </p:cSld>
   <p:clrMapOvr>
@@ -7203,45 +7205,6 @@
       </p:sp>
       <p:sp>
         <p:nvSpPr>
-          <p:cNvPr id="6" name="Text 3"/>
-          <p:cNvSpPr/>
-          <p:nvPr/>
-        </p:nvSpPr>
-        <p:spPr>
-          <a:xfrm>
-            <a:off x="7744968" y="4636008"/>
-            <a:ext cx="1371600" cy="164592"/>
-          </a:xfrm>
-          <a:prstGeom prst="rect">
-            <a:avLst/>
-          </a:prstGeom>
-          <a:noFill/>
-          <a:ln/>
-        </p:spPr>
-        <p:txBody>
-          <a:bodyPr wrap="square" lIns="0" tIns="0" rIns="0" bIns="0" rtlCol="0" anchor="ctr"/>
-          <a:lstStyle/>
-          <a:p>
-            <a:pPr marL="0" indent="0" algn="r">
-              <a:buNone/>
-            </a:pPr>
-            <a:r>
-              <a:rPr lang="en-US" sz="850" dirty="0">
-                <a:solidFill>
-                  <a:srgbClr val="000000"/>
-                </a:solidFill>
-                <a:latin typeface="Arial" pitchFamily="34" charset="0"/>
-                <a:ea typeface="Arial" pitchFamily="34" charset="-122"/>
-                <a:cs typeface="Arial" pitchFamily="34" charset="-120"/>
-              </a:rPr>
-              <a:t>16/07/2025</a:t>
-            </a:r>
-            <a:endParaRPr lang="en-US" sz="850" dirty="0"/>
-          </a:p>
-        </p:txBody>
-      </p:sp>
-      <p:sp>
-        <p:nvSpPr>
           <p:cNvPr id="7" name="Text 4"/>
           <p:cNvSpPr/>
           <p:nvPr/>
@@ -7587,6 +7550,55 @@
               <a:t>Submodule 2: Markdown Report Generation + CI/CD Integration</a:t>
             </a:r>
             <a:endParaRPr lang="en-US" sz="1200" dirty="0"/>
+          </a:p>
+        </p:txBody>
+      </p:sp>
+      <p:sp>
+        <p:nvSpPr>
+          <p:cNvPr id="9" name="Text 3">
+            <a:extLst>
+              <a:ext uri="{FF2B5EF4-FFF2-40B4-BE49-F238E27FC236}">
+                <a16:creationId xmlns:a16="http://schemas.microsoft.com/office/drawing/2014/main" id="{C85569AA-47DA-4A76-E25D-47A099FC8711}"/>
+              </a:ext>
+            </a:extLst>
+          </p:cNvPr>
+          <p:cNvSpPr/>
+          <p:nvPr/>
+        </p:nvSpPr>
+        <p:spPr>
+          <a:xfrm>
+            <a:off x="7744968" y="4623976"/>
+            <a:ext cx="1371600" cy="164592"/>
+          </a:xfrm>
+          <a:prstGeom prst="rect">
+            <a:avLst/>
+          </a:prstGeom>
+          <a:noFill/>
+          <a:ln/>
+        </p:spPr>
+        <p:txBody>
+          <a:bodyPr wrap="square" lIns="0" tIns="0" rIns="0" bIns="0" rtlCol="0" anchor="ctr"/>
+          <a:lstStyle/>
+          <a:p>
+            <a:pPr algn="r"/>
+            <a:r>
+              <a:rPr lang="en-US" sz="850" dirty="0">
+                <a:solidFill>
+                  <a:srgbClr val="000000"/>
+                </a:solidFill>
+                <a:latin typeface="Arial" pitchFamily="34" charset="0"/>
+                <a:ea typeface="Arial" pitchFamily="34" charset="-122"/>
+                <a:cs typeface="Arial" pitchFamily="34" charset="-120"/>
+              </a:rPr>
+              <a:t>17/04/2026</a:t>
+            </a:r>
+            <a:endParaRPr lang="en-US" sz="850" dirty="0"/>
+          </a:p>
+          <a:p>
+            <a:pPr marL="0" indent="0" algn="r">
+              <a:buNone/>
+            </a:pPr>
+            <a:endParaRPr lang="en-US" sz="850" dirty="0"/>
           </a:p>
         </p:txBody>
       </p:sp>
@@ -7752,49 +7764,6 @@
       </p:sp>
       <p:sp>
         <p:nvSpPr>
-          <p:cNvPr id="6" name="Text 3"/>
-          <p:cNvSpPr/>
-          <p:nvPr/>
-        </p:nvSpPr>
-        <p:spPr>
-          <a:xfrm>
-            <a:off x="7744968" y="4636008"/>
-            <a:ext cx="1371600" cy="164592"/>
-          </a:xfrm>
-          <a:prstGeom prst="rect">
-            <a:avLst/>
-          </a:prstGeom>
-          <a:noFill/>
-          <a:ln/>
-        </p:spPr>
-        <p:txBody>
-          <a:bodyPr wrap="square" lIns="0" tIns="0" rIns="0" bIns="0" rtlCol="0" anchor="ctr"/>
-          <a:lstStyle/>
-          <a:p>
-            <a:pPr algn="r"/>
-            <a:r>
-              <a:rPr lang="en-US" sz="850" dirty="0">
-                <a:solidFill>
-                  <a:srgbClr val="000000"/>
-                </a:solidFill>
-                <a:latin typeface="Arial" pitchFamily="34" charset="0"/>
-                <a:ea typeface="Arial" pitchFamily="34" charset="-122"/>
-                <a:cs typeface="Arial" pitchFamily="34" charset="-120"/>
-              </a:rPr>
-              <a:t>18/03/2026</a:t>
-            </a:r>
-            <a:endParaRPr lang="en-US" sz="850" dirty="0"/>
-          </a:p>
-          <a:p>
-            <a:pPr marL="0" indent="0" algn="r">
-              <a:buNone/>
-            </a:pPr>
-            <a:endParaRPr lang="en-US" sz="850" dirty="0"/>
-          </a:p>
-        </p:txBody>
-      </p:sp>
-      <p:sp>
-        <p:nvSpPr>
           <p:cNvPr id="7" name="Text 4"/>
           <p:cNvSpPr/>
           <p:nvPr/>
@@ -8008,6 +7977,55 @@
               <a:t>CloudFormation resource summary → Titan embedding → cosine similarity search → Top-5 relevant CIS passages returned and injected into LLM prompt.</a:t>
             </a:r>
             <a:endParaRPr lang="en-US" sz="1300" dirty="0"/>
+          </a:p>
+        </p:txBody>
+      </p:sp>
+      <p:sp>
+        <p:nvSpPr>
+          <p:cNvPr id="9" name="Text 3">
+            <a:extLst>
+              <a:ext uri="{FF2B5EF4-FFF2-40B4-BE49-F238E27FC236}">
+                <a16:creationId xmlns:a16="http://schemas.microsoft.com/office/drawing/2014/main" id="{7B1987AA-93B6-C8EF-B66D-63A6B50D75F2}"/>
+              </a:ext>
+            </a:extLst>
+          </p:cNvPr>
+          <p:cNvSpPr/>
+          <p:nvPr/>
+        </p:nvSpPr>
+        <p:spPr>
+          <a:xfrm>
+            <a:off x="7671431" y="4753917"/>
+            <a:ext cx="1371600" cy="164592"/>
+          </a:xfrm>
+          <a:prstGeom prst="rect">
+            <a:avLst/>
+          </a:prstGeom>
+          <a:noFill/>
+          <a:ln/>
+        </p:spPr>
+        <p:txBody>
+          <a:bodyPr wrap="square" lIns="0" tIns="0" rIns="0" bIns="0" rtlCol="0" anchor="ctr"/>
+          <a:lstStyle/>
+          <a:p>
+            <a:pPr algn="r"/>
+            <a:r>
+              <a:rPr lang="en-US" sz="850" dirty="0">
+                <a:solidFill>
+                  <a:srgbClr val="000000"/>
+                </a:solidFill>
+                <a:latin typeface="Arial" pitchFamily="34" charset="0"/>
+                <a:ea typeface="Arial" pitchFamily="34" charset="-122"/>
+                <a:cs typeface="Arial" pitchFamily="34" charset="-120"/>
+              </a:rPr>
+              <a:t>17/04/2026</a:t>
+            </a:r>
+            <a:endParaRPr lang="en-US" sz="850" dirty="0"/>
+          </a:p>
+          <a:p>
+            <a:pPr marL="0" indent="0" algn="r">
+              <a:buNone/>
+            </a:pPr>
+            <a:endParaRPr lang="en-US" sz="850" dirty="0"/>
           </a:p>
         </p:txBody>
       </p:sp>
@@ -8173,49 +8191,6 @@
       </p:sp>
       <p:sp>
         <p:nvSpPr>
-          <p:cNvPr id="6" name="Text 3"/>
-          <p:cNvSpPr/>
-          <p:nvPr/>
-        </p:nvSpPr>
-        <p:spPr>
-          <a:xfrm>
-            <a:off x="7744968" y="4636008"/>
-            <a:ext cx="1371600" cy="164592"/>
-          </a:xfrm>
-          <a:prstGeom prst="rect">
-            <a:avLst/>
-          </a:prstGeom>
-          <a:noFill/>
-          <a:ln/>
-        </p:spPr>
-        <p:txBody>
-          <a:bodyPr wrap="square" lIns="0" tIns="0" rIns="0" bIns="0" rtlCol="0" anchor="ctr"/>
-          <a:lstStyle/>
-          <a:p>
-            <a:pPr algn="r"/>
-            <a:r>
-              <a:rPr lang="en-US" sz="850" dirty="0">
-                <a:solidFill>
-                  <a:srgbClr val="000000"/>
-                </a:solidFill>
-                <a:latin typeface="Arial" pitchFamily="34" charset="0"/>
-                <a:ea typeface="Arial" pitchFamily="34" charset="-122"/>
-                <a:cs typeface="Arial" pitchFamily="34" charset="-120"/>
-              </a:rPr>
-              <a:t>18/03/2026</a:t>
-            </a:r>
-            <a:endParaRPr lang="en-US" sz="850" dirty="0"/>
-          </a:p>
-          <a:p>
-            <a:pPr marL="0" indent="0" algn="r">
-              <a:buNone/>
-            </a:pPr>
-            <a:endParaRPr lang="en-US" sz="850" dirty="0"/>
-          </a:p>
-        </p:txBody>
-      </p:sp>
-      <p:sp>
-        <p:nvSpPr>
           <p:cNvPr id="7" name="Text 4"/>
           <p:cNvSpPr/>
           <p:nvPr/>
@@ -8279,6 +8254,7 @@
                 <a:spcPts val="400"/>
               </a:spcAft>
               <a:buSzPct val="100000"/>
+              <a:buFont typeface="Arial" panose="020B0604020202020204" pitchFamily="34" charset="0"/>
               <a:buChar char="•"/>
             </a:pPr>
             <a:r>
@@ -8300,6 +8276,7 @@
                 <a:spcPts val="400"/>
               </a:spcAft>
               <a:buSzPct val="100000"/>
+              <a:buFont typeface="Arial" panose="020B0604020202020204" pitchFamily="34" charset="0"/>
               <a:buChar char="•"/>
             </a:pPr>
             <a:r>
@@ -8321,6 +8298,7 @@
                 <a:spcPts val="400"/>
               </a:spcAft>
               <a:buSzPct val="100000"/>
+              <a:buFont typeface="Arial" panose="020B0604020202020204" pitchFamily="34" charset="0"/>
               <a:buChar char="•"/>
             </a:pPr>
             <a:r>
@@ -8342,6 +8320,7 @@
                 <a:spcPts val="400"/>
               </a:spcAft>
               <a:buSzPct val="100000"/>
+              <a:buFont typeface="Arial" panose="020B0604020202020204" pitchFamily="34" charset="0"/>
               <a:buChar char="•"/>
             </a:pPr>
             <a:r>
@@ -8363,6 +8342,7 @@
                 <a:spcPts val="400"/>
               </a:spcAft>
               <a:buSzPct val="100000"/>
+              <a:buFont typeface="Arial" panose="020B0604020202020204" pitchFamily="34" charset="0"/>
               <a:buChar char="•"/>
             </a:pPr>
             <a:r>
@@ -8384,6 +8364,7 @@
                 <a:spcPts val="400"/>
               </a:spcAft>
               <a:buSzPct val="100000"/>
+              <a:buFont typeface="Arial" panose="020B0604020202020204" pitchFamily="34" charset="0"/>
               <a:buChar char="•"/>
             </a:pPr>
             <a:r>
@@ -8405,6 +8386,7 @@
                 <a:spcPts val="400"/>
               </a:spcAft>
               <a:buSzPct val="100000"/>
+              <a:buFont typeface="Arial" panose="020B0604020202020204" pitchFamily="34" charset="0"/>
               <a:buChar char="•"/>
             </a:pPr>
             <a:r>
@@ -8426,6 +8408,7 @@
                 <a:spcPts val="400"/>
               </a:spcAft>
               <a:buSzPct val="100000"/>
+              <a:buFont typeface="Arial" panose="020B0604020202020204" pitchFamily="34" charset="0"/>
               <a:buChar char="•"/>
             </a:pPr>
             <a:r>
@@ -8447,6 +8430,7 @@
                 <a:spcPts val="400"/>
               </a:spcAft>
               <a:buSzPct val="100000"/>
+              <a:buFont typeface="Arial" panose="020B0604020202020204" pitchFamily="34" charset="0"/>
               <a:buChar char="•"/>
             </a:pPr>
             <a:r>
@@ -8468,6 +8452,7 @@
                 <a:spcPts val="400"/>
               </a:spcAft>
               <a:buSzPct val="100000"/>
+              <a:buFont typeface="Arial" panose="020B0604020202020204" pitchFamily="34" charset="0"/>
               <a:buChar char="•"/>
             </a:pPr>
             <a:r>
@@ -8489,6 +8474,7 @@
                 <a:spcPts val="400"/>
               </a:spcAft>
               <a:buSzPct val="100000"/>
+              <a:buFont typeface="Arial" panose="020B0604020202020204" pitchFamily="34" charset="0"/>
               <a:buChar char="•"/>
             </a:pPr>
             <a:r>
@@ -8503,6 +8489,55 @@
               <a:t>Produces a plain-English resource summary (not raw YAML) with security risk signals for LLM context injection.</a:t>
             </a:r>
             <a:endParaRPr lang="en-US" sz="1300" dirty="0"/>
+          </a:p>
+        </p:txBody>
+      </p:sp>
+      <p:sp>
+        <p:nvSpPr>
+          <p:cNvPr id="9" name="Text 3">
+            <a:extLst>
+              <a:ext uri="{FF2B5EF4-FFF2-40B4-BE49-F238E27FC236}">
+                <a16:creationId xmlns:a16="http://schemas.microsoft.com/office/drawing/2014/main" id="{779A8AF6-1647-8CC7-E992-399A8F5DF5A9}"/>
+              </a:ext>
+            </a:extLst>
+          </p:cNvPr>
+          <p:cNvSpPr/>
+          <p:nvPr/>
+        </p:nvSpPr>
+        <p:spPr>
+          <a:xfrm>
+            <a:off x="7699248" y="4870623"/>
+            <a:ext cx="1371600" cy="164592"/>
+          </a:xfrm>
+          <a:prstGeom prst="rect">
+            <a:avLst/>
+          </a:prstGeom>
+          <a:noFill/>
+          <a:ln/>
+        </p:spPr>
+        <p:txBody>
+          <a:bodyPr wrap="square" lIns="0" tIns="0" rIns="0" bIns="0" rtlCol="0" anchor="ctr"/>
+          <a:lstStyle/>
+          <a:p>
+            <a:pPr algn="r"/>
+            <a:r>
+              <a:rPr lang="en-US" sz="850" dirty="0">
+                <a:solidFill>
+                  <a:srgbClr val="000000"/>
+                </a:solidFill>
+                <a:latin typeface="Arial" pitchFamily="34" charset="0"/>
+                <a:ea typeface="Arial" pitchFamily="34" charset="-122"/>
+                <a:cs typeface="Arial" pitchFamily="34" charset="-120"/>
+              </a:rPr>
+              <a:t>17/04/2026</a:t>
+            </a:r>
+            <a:endParaRPr lang="en-US" sz="850" dirty="0"/>
+          </a:p>
+          <a:p>
+            <a:pPr marL="0" indent="0" algn="r">
+              <a:buNone/>
+            </a:pPr>
+            <a:endParaRPr lang="en-US" sz="850" dirty="0"/>
           </a:p>
         </p:txBody>
       </p:sp>
@@ -8668,49 +8703,6 @@
       </p:sp>
       <p:sp>
         <p:nvSpPr>
-          <p:cNvPr id="6" name="Text 3"/>
-          <p:cNvSpPr/>
-          <p:nvPr/>
-        </p:nvSpPr>
-        <p:spPr>
-          <a:xfrm>
-            <a:off x="7744968" y="4636008"/>
-            <a:ext cx="1371600" cy="164592"/>
-          </a:xfrm>
-          <a:prstGeom prst="rect">
-            <a:avLst/>
-          </a:prstGeom>
-          <a:noFill/>
-          <a:ln/>
-        </p:spPr>
-        <p:txBody>
-          <a:bodyPr wrap="square" lIns="0" tIns="0" rIns="0" bIns="0" rtlCol="0" anchor="ctr"/>
-          <a:lstStyle/>
-          <a:p>
-            <a:pPr algn="r"/>
-            <a:r>
-              <a:rPr lang="en-US" sz="850" dirty="0">
-                <a:solidFill>
-                  <a:srgbClr val="000000"/>
-                </a:solidFill>
-                <a:latin typeface="Arial" pitchFamily="34" charset="0"/>
-                <a:ea typeface="Arial" pitchFamily="34" charset="-122"/>
-                <a:cs typeface="Arial" pitchFamily="34" charset="-120"/>
-              </a:rPr>
-              <a:t>18/03/2026</a:t>
-            </a:r>
-            <a:endParaRPr lang="en-US" sz="850" dirty="0"/>
-          </a:p>
-          <a:p>
-            <a:pPr marL="0" indent="0" algn="r">
-              <a:buNone/>
-            </a:pPr>
-            <a:endParaRPr lang="en-US" sz="850" dirty="0"/>
-          </a:p>
-        </p:txBody>
-      </p:sp>
-      <p:sp>
-        <p:nvSpPr>
           <p:cNvPr id="7" name="Text 4"/>
           <p:cNvSpPr/>
           <p:nvPr/>
@@ -8986,6 +8978,55 @@
               <a:t>Filters out findings missing required fields; assigns CRITICAL/HIGH/MEDIUM/LOW severity using heuristic overrides (e.g., hardcoded secret → CRITICAL minimum).</a:t>
             </a:r>
             <a:endParaRPr lang="en-US" sz="1200" dirty="0"/>
+          </a:p>
+        </p:txBody>
+      </p:sp>
+      <p:sp>
+        <p:nvSpPr>
+          <p:cNvPr id="9" name="Text 3">
+            <a:extLst>
+              <a:ext uri="{FF2B5EF4-FFF2-40B4-BE49-F238E27FC236}">
+                <a16:creationId xmlns:a16="http://schemas.microsoft.com/office/drawing/2014/main" id="{F9808976-C3E7-3DFC-62A9-7075E2AFF6FE}"/>
+              </a:ext>
+            </a:extLst>
+          </p:cNvPr>
+          <p:cNvSpPr/>
+          <p:nvPr/>
+        </p:nvSpPr>
+        <p:spPr>
+          <a:xfrm>
+            <a:off x="7636684" y="4798434"/>
+            <a:ext cx="1371600" cy="164592"/>
+          </a:xfrm>
+          <a:prstGeom prst="rect">
+            <a:avLst/>
+          </a:prstGeom>
+          <a:noFill/>
+          <a:ln/>
+        </p:spPr>
+        <p:txBody>
+          <a:bodyPr wrap="square" lIns="0" tIns="0" rIns="0" bIns="0" rtlCol="0" anchor="ctr"/>
+          <a:lstStyle/>
+          <a:p>
+            <a:pPr algn="r"/>
+            <a:r>
+              <a:rPr lang="en-US" sz="850" dirty="0">
+                <a:solidFill>
+                  <a:srgbClr val="000000"/>
+                </a:solidFill>
+                <a:latin typeface="Arial" pitchFamily="34" charset="0"/>
+                <a:ea typeface="Arial" pitchFamily="34" charset="-122"/>
+                <a:cs typeface="Arial" pitchFamily="34" charset="-120"/>
+              </a:rPr>
+              <a:t>17/04/2026</a:t>
+            </a:r>
+            <a:endParaRPr lang="en-US" sz="850" dirty="0"/>
+          </a:p>
+          <a:p>
+            <a:pPr marL="0" indent="0" algn="r">
+              <a:buNone/>
+            </a:pPr>
+            <a:endParaRPr lang="en-US" sz="850" dirty="0"/>
           </a:p>
         </p:txBody>
       </p:sp>
@@ -9151,49 +9192,6 @@
       </p:sp>
       <p:sp>
         <p:nvSpPr>
-          <p:cNvPr id="6" name="Text 3"/>
-          <p:cNvSpPr/>
-          <p:nvPr/>
-        </p:nvSpPr>
-        <p:spPr>
-          <a:xfrm>
-            <a:off x="7744968" y="4636008"/>
-            <a:ext cx="1371600" cy="164592"/>
-          </a:xfrm>
-          <a:prstGeom prst="rect">
-            <a:avLst/>
-          </a:prstGeom>
-          <a:noFill/>
-          <a:ln/>
-        </p:spPr>
-        <p:txBody>
-          <a:bodyPr wrap="square" lIns="0" tIns="0" rIns="0" bIns="0" rtlCol="0" anchor="ctr"/>
-          <a:lstStyle/>
-          <a:p>
-            <a:pPr algn="r"/>
-            <a:r>
-              <a:rPr lang="en-US" sz="850" dirty="0">
-                <a:solidFill>
-                  <a:srgbClr val="000000"/>
-                </a:solidFill>
-                <a:latin typeface="Arial" pitchFamily="34" charset="0"/>
-                <a:ea typeface="Arial" pitchFamily="34" charset="-122"/>
-                <a:cs typeface="Arial" pitchFamily="34" charset="-120"/>
-              </a:rPr>
-              <a:t>18/03/2026</a:t>
-            </a:r>
-            <a:endParaRPr lang="en-US" sz="850" dirty="0"/>
-          </a:p>
-          <a:p>
-            <a:pPr marL="0" indent="0" algn="r">
-              <a:buNone/>
-            </a:pPr>
-            <a:endParaRPr lang="en-US" sz="850" dirty="0"/>
-          </a:p>
-        </p:txBody>
-      </p:sp>
-      <p:sp>
-        <p:nvSpPr>
           <p:cNvPr id="7" name="Text 4"/>
           <p:cNvSpPr/>
           <p:nvPr/>
@@ -9469,6 +9467,55 @@
               <a:t>Exit codes: 0 (clean template), 1 (vulnerabilities found), 2 (scan error) — for GitHub Actions, GitLab CI, Jenkins build-gate enforcement.</a:t>
             </a:r>
             <a:endParaRPr lang="en-US" sz="1200" dirty="0"/>
+          </a:p>
+        </p:txBody>
+      </p:sp>
+      <p:sp>
+        <p:nvSpPr>
+          <p:cNvPr id="9" name="Text 3">
+            <a:extLst>
+              <a:ext uri="{FF2B5EF4-FFF2-40B4-BE49-F238E27FC236}">
+                <a16:creationId xmlns:a16="http://schemas.microsoft.com/office/drawing/2014/main" id="{4A87FD8E-4CDD-3229-37EE-978CA8D37D44}"/>
+              </a:ext>
+            </a:extLst>
+          </p:cNvPr>
+          <p:cNvSpPr/>
+          <p:nvPr/>
+        </p:nvSpPr>
+        <p:spPr>
+          <a:xfrm>
+            <a:off x="7699248" y="4882655"/>
+            <a:ext cx="1371600" cy="164592"/>
+          </a:xfrm>
+          <a:prstGeom prst="rect">
+            <a:avLst/>
+          </a:prstGeom>
+          <a:noFill/>
+          <a:ln/>
+        </p:spPr>
+        <p:txBody>
+          <a:bodyPr wrap="square" lIns="0" tIns="0" rIns="0" bIns="0" rtlCol="0" anchor="ctr"/>
+          <a:lstStyle/>
+          <a:p>
+            <a:pPr algn="r"/>
+            <a:r>
+              <a:rPr lang="en-US" sz="850" dirty="0">
+                <a:solidFill>
+                  <a:srgbClr val="000000"/>
+                </a:solidFill>
+                <a:latin typeface="Arial" pitchFamily="34" charset="0"/>
+                <a:ea typeface="Arial" pitchFamily="34" charset="-122"/>
+                <a:cs typeface="Arial" pitchFamily="34" charset="-120"/>
+              </a:rPr>
+              <a:t>17/04/2026</a:t>
+            </a:r>
+            <a:endParaRPr lang="en-US" sz="850" dirty="0"/>
+          </a:p>
+          <a:p>
+            <a:pPr marL="0" indent="0" algn="r">
+              <a:buNone/>
+            </a:pPr>
+            <a:endParaRPr lang="en-US" sz="850" dirty="0"/>
           </a:p>
         </p:txBody>
       </p:sp>
@@ -9628,115 +9675,6 @@
               </a:rPr>
               <a:t>School of Computing</a:t>
             </a:r>
-            <a:endParaRPr lang="en-US" sz="850" dirty="0"/>
-          </a:p>
-        </p:txBody>
-      </p:sp>
-      <p:sp>
-        <p:nvSpPr>
-          <p:cNvPr id="6" name="Text 3"/>
-          <p:cNvSpPr/>
-          <p:nvPr/>
-        </p:nvSpPr>
-        <p:spPr>
-          <a:xfrm>
-            <a:off x="7744968" y="4636008"/>
-            <a:ext cx="1371600" cy="164592"/>
-          </a:xfrm>
-          <a:prstGeom prst="rect">
-            <a:avLst/>
-          </a:prstGeom>
-          <a:noFill/>
-          <a:ln/>
-        </p:spPr>
-        <p:txBody>
-          <a:bodyPr wrap="square" lIns="0" tIns="0" rIns="0" bIns="0" rtlCol="0" anchor="ctr"/>
-          <a:lstStyle/>
-          <a:p>
-            <a:pPr algn="r"/>
-            <a:endParaRPr lang="en-US" sz="850" dirty="0">
-              <a:solidFill>
-                <a:srgbClr val="000000"/>
-              </a:solidFill>
-              <a:latin typeface="Arial" pitchFamily="34" charset="0"/>
-              <a:ea typeface="Arial" pitchFamily="34" charset="-122"/>
-              <a:cs typeface="Arial" pitchFamily="34" charset="-120"/>
-            </a:endParaRPr>
-          </a:p>
-          <a:p>
-            <a:pPr algn="r"/>
-            <a:endParaRPr lang="en-US" sz="850" dirty="0">
-              <a:solidFill>
-                <a:srgbClr val="000000"/>
-              </a:solidFill>
-              <a:latin typeface="Arial" pitchFamily="34" charset="0"/>
-              <a:ea typeface="Arial" pitchFamily="34" charset="-122"/>
-              <a:cs typeface="Arial" pitchFamily="34" charset="-120"/>
-            </a:endParaRPr>
-          </a:p>
-          <a:p>
-            <a:pPr algn="r"/>
-            <a:endParaRPr lang="en-US" sz="850" dirty="0">
-              <a:solidFill>
-                <a:srgbClr val="000000"/>
-              </a:solidFill>
-              <a:latin typeface="Arial" pitchFamily="34" charset="0"/>
-              <a:ea typeface="Arial" pitchFamily="34" charset="-122"/>
-              <a:cs typeface="Arial" pitchFamily="34" charset="-120"/>
-            </a:endParaRPr>
-          </a:p>
-          <a:p>
-            <a:pPr algn="r"/>
-            <a:endParaRPr lang="en-US" sz="850" dirty="0">
-              <a:solidFill>
-                <a:srgbClr val="000000"/>
-              </a:solidFill>
-              <a:latin typeface="Arial" pitchFamily="34" charset="0"/>
-              <a:ea typeface="Arial" pitchFamily="34" charset="-122"/>
-              <a:cs typeface="Arial" pitchFamily="34" charset="-120"/>
-            </a:endParaRPr>
-          </a:p>
-          <a:p>
-            <a:pPr algn="r"/>
-            <a:endParaRPr lang="en-US" sz="850" dirty="0">
-              <a:solidFill>
-                <a:srgbClr val="000000"/>
-              </a:solidFill>
-              <a:latin typeface="Arial" pitchFamily="34" charset="0"/>
-              <a:ea typeface="Arial" pitchFamily="34" charset="-122"/>
-              <a:cs typeface="Arial" pitchFamily="34" charset="-120"/>
-            </a:endParaRPr>
-          </a:p>
-          <a:p>
-            <a:pPr algn="r"/>
-            <a:endParaRPr lang="en-US" sz="850" dirty="0">
-              <a:solidFill>
-                <a:srgbClr val="000000"/>
-              </a:solidFill>
-              <a:latin typeface="Arial" pitchFamily="34" charset="0"/>
-              <a:ea typeface="Arial" pitchFamily="34" charset="-122"/>
-              <a:cs typeface="Arial" pitchFamily="34" charset="-120"/>
-            </a:endParaRPr>
-          </a:p>
-          <a:p>
-            <a:pPr algn="r"/>
-            <a:r>
-              <a:rPr lang="en-US" sz="850" dirty="0">
-                <a:solidFill>
-                  <a:srgbClr val="000000"/>
-                </a:solidFill>
-                <a:latin typeface="Arial" pitchFamily="34" charset="0"/>
-                <a:ea typeface="Arial" pitchFamily="34" charset="-122"/>
-                <a:cs typeface="Arial" pitchFamily="34" charset="-120"/>
-              </a:rPr>
-              <a:t>18/03/2026</a:t>
-            </a:r>
-            <a:endParaRPr lang="en-US" sz="850" dirty="0"/>
-          </a:p>
-          <a:p>
-            <a:pPr marL="0" indent="0" algn="r">
-              <a:buNone/>
-            </a:pPr>
             <a:endParaRPr lang="en-US" sz="850" dirty="0"/>
           </a:p>
         </p:txBody>
@@ -10996,6 +10934,55 @@
           </a:prstGeom>
         </p:spPr>
       </p:pic>
+      <p:sp>
+        <p:nvSpPr>
+          <p:cNvPr id="8" name="Text 3">
+            <a:extLst>
+              <a:ext uri="{FF2B5EF4-FFF2-40B4-BE49-F238E27FC236}">
+                <a16:creationId xmlns:a16="http://schemas.microsoft.com/office/drawing/2014/main" id="{087BC231-3C59-E3B1-B8B5-53F5B64FBD09}"/>
+              </a:ext>
+            </a:extLst>
+          </p:cNvPr>
+          <p:cNvSpPr/>
+          <p:nvPr/>
+        </p:nvSpPr>
+        <p:spPr>
+          <a:xfrm>
+            <a:off x="7699248" y="4978908"/>
+            <a:ext cx="1371600" cy="164592"/>
+          </a:xfrm>
+          <a:prstGeom prst="rect">
+            <a:avLst/>
+          </a:prstGeom>
+          <a:noFill/>
+          <a:ln/>
+        </p:spPr>
+        <p:txBody>
+          <a:bodyPr wrap="square" lIns="0" tIns="0" rIns="0" bIns="0" rtlCol="0" anchor="ctr"/>
+          <a:lstStyle/>
+          <a:p>
+            <a:pPr algn="r"/>
+            <a:r>
+              <a:rPr lang="en-US" sz="850" dirty="0">
+                <a:solidFill>
+                  <a:srgbClr val="000000"/>
+                </a:solidFill>
+                <a:latin typeface="Arial" pitchFamily="34" charset="0"/>
+                <a:ea typeface="Arial" pitchFamily="34" charset="-122"/>
+                <a:cs typeface="Arial" pitchFamily="34" charset="-120"/>
+              </a:rPr>
+              <a:t>17/04/2026</a:t>
+            </a:r>
+            <a:endParaRPr lang="en-US" sz="850" dirty="0"/>
+          </a:p>
+          <a:p>
+            <a:pPr marL="0" indent="0" algn="r">
+              <a:buNone/>
+            </a:pPr>
+            <a:endParaRPr lang="en-US" sz="850" dirty="0"/>
+          </a:p>
+        </p:txBody>
+      </p:sp>
     </p:spTree>
   </p:cSld>
   <p:clrMapOvr>
@@ -11164,7 +11151,7 @@
         </p:nvSpPr>
         <p:spPr>
           <a:xfrm>
-            <a:off x="7744968" y="4636008"/>
+            <a:off x="7744968" y="4897265"/>
             <a:ext cx="1371600" cy="164592"/>
           </a:xfrm>
           <a:prstGeom prst="rect">
@@ -11187,8 +11174,12 @@
                 <a:ea typeface="Arial" pitchFamily="34" charset="-122"/>
                 <a:cs typeface="Arial" pitchFamily="34" charset="-120"/>
               </a:rPr>
-              <a:t>18/03/2026</a:t>
-            </a:r>
+              <a:t>17/04/2026</a:t>
+            </a:r>
+            <a:endParaRPr lang="en-US" sz="850" dirty="0"/>
+          </a:p>
+          <a:p>
+            <a:pPr algn="r"/>
             <a:endParaRPr lang="en-US" sz="850" dirty="0"/>
           </a:p>
           <a:p>
@@ -11732,82 +11723,6 @@
               </a:rPr>
               <a:t>School of Computing</a:t>
             </a:r>
-            <a:endParaRPr lang="en-US" sz="850" dirty="0"/>
-          </a:p>
-        </p:txBody>
-      </p:sp>
-      <p:sp>
-        <p:nvSpPr>
-          <p:cNvPr id="6" name="Text 3"/>
-          <p:cNvSpPr/>
-          <p:nvPr/>
-        </p:nvSpPr>
-        <p:spPr>
-          <a:xfrm>
-            <a:off x="7744968" y="4636008"/>
-            <a:ext cx="1371600" cy="164592"/>
-          </a:xfrm>
-          <a:prstGeom prst="rect">
-            <a:avLst/>
-          </a:prstGeom>
-          <a:noFill/>
-          <a:ln/>
-        </p:spPr>
-        <p:txBody>
-          <a:bodyPr wrap="square" lIns="0" tIns="0" rIns="0" bIns="0" rtlCol="0" anchor="ctr"/>
-          <a:lstStyle/>
-          <a:p>
-            <a:pPr algn="r"/>
-            <a:endParaRPr lang="en-US" sz="850" dirty="0">
-              <a:solidFill>
-                <a:srgbClr val="000000"/>
-              </a:solidFill>
-              <a:latin typeface="Arial" pitchFamily="34" charset="0"/>
-              <a:ea typeface="Arial" pitchFamily="34" charset="-122"/>
-              <a:cs typeface="Arial" pitchFamily="34" charset="-120"/>
-            </a:endParaRPr>
-          </a:p>
-          <a:p>
-            <a:pPr algn="r"/>
-            <a:endParaRPr lang="en-US" sz="850" dirty="0">
-              <a:solidFill>
-                <a:srgbClr val="000000"/>
-              </a:solidFill>
-              <a:latin typeface="Arial" pitchFamily="34" charset="0"/>
-              <a:ea typeface="Arial" pitchFamily="34" charset="-122"/>
-              <a:cs typeface="Arial" pitchFamily="34" charset="-120"/>
-            </a:endParaRPr>
-          </a:p>
-          <a:p>
-            <a:pPr algn="r"/>
-            <a:endParaRPr lang="en-US" sz="850" dirty="0">
-              <a:solidFill>
-                <a:srgbClr val="000000"/>
-              </a:solidFill>
-              <a:latin typeface="Arial" pitchFamily="34" charset="0"/>
-              <a:ea typeface="Arial" pitchFamily="34" charset="-122"/>
-              <a:cs typeface="Arial" pitchFamily="34" charset="-120"/>
-            </a:endParaRPr>
-          </a:p>
-          <a:p>
-            <a:pPr algn="r"/>
-            <a:r>
-              <a:rPr lang="en-US" sz="850" dirty="0">
-                <a:solidFill>
-                  <a:srgbClr val="000000"/>
-                </a:solidFill>
-                <a:latin typeface="Arial" pitchFamily="34" charset="0"/>
-                <a:ea typeface="Arial" pitchFamily="34" charset="-122"/>
-                <a:cs typeface="Arial" pitchFamily="34" charset="-120"/>
-              </a:rPr>
-              <a:t>18/03/2026</a:t>
-            </a:r>
-            <a:endParaRPr lang="en-US" sz="850" dirty="0"/>
-          </a:p>
-          <a:p>
-            <a:pPr marL="0" indent="0" algn="r">
-              <a:buNone/>
-            </a:pPr>
             <a:endParaRPr lang="en-US" sz="850" dirty="0"/>
           </a:p>
         </p:txBody>
@@ -12179,6 +12094,55 @@
           </a:prstGeom>
         </p:spPr>
       </p:pic>
+      <p:sp>
+        <p:nvSpPr>
+          <p:cNvPr id="13" name="Text 3">
+            <a:extLst>
+              <a:ext uri="{FF2B5EF4-FFF2-40B4-BE49-F238E27FC236}">
+                <a16:creationId xmlns:a16="http://schemas.microsoft.com/office/drawing/2014/main" id="{D22F7E4F-4FB7-5B05-8457-7A9631BAF4D0}"/>
+              </a:ext>
+            </a:extLst>
+          </p:cNvPr>
+          <p:cNvSpPr/>
+          <p:nvPr/>
+        </p:nvSpPr>
+        <p:spPr>
+          <a:xfrm>
+            <a:off x="7683490" y="4766502"/>
+            <a:ext cx="1371600" cy="164592"/>
+          </a:xfrm>
+          <a:prstGeom prst="rect">
+            <a:avLst/>
+          </a:prstGeom>
+          <a:noFill/>
+          <a:ln/>
+        </p:spPr>
+        <p:txBody>
+          <a:bodyPr wrap="square" lIns="0" tIns="0" rIns="0" bIns="0" rtlCol="0" anchor="ctr"/>
+          <a:lstStyle/>
+          <a:p>
+            <a:pPr algn="r"/>
+            <a:r>
+              <a:rPr lang="en-US" sz="850" dirty="0">
+                <a:solidFill>
+                  <a:srgbClr val="000000"/>
+                </a:solidFill>
+                <a:latin typeface="Arial" pitchFamily="34" charset="0"/>
+                <a:ea typeface="Arial" pitchFamily="34" charset="-122"/>
+                <a:cs typeface="Arial" pitchFamily="34" charset="-120"/>
+              </a:rPr>
+              <a:t>17/04/2026</a:t>
+            </a:r>
+            <a:endParaRPr lang="en-US" sz="850" dirty="0"/>
+          </a:p>
+          <a:p>
+            <a:pPr marL="0" indent="0" algn="r">
+              <a:buNone/>
+            </a:pPr>
+            <a:endParaRPr lang="en-US" sz="850" dirty="0"/>
+          </a:p>
+        </p:txBody>
+      </p:sp>
     </p:spTree>
   </p:cSld>
   <p:clrMapOvr>
@@ -12371,88 +12335,6 @@
       </p:sp>
       <p:sp>
         <p:nvSpPr>
-          <p:cNvPr id="6" name="Text 3">
-            <a:extLst>
-              <a:ext uri="{FF2B5EF4-FFF2-40B4-BE49-F238E27FC236}">
-                <a16:creationId xmlns:a16="http://schemas.microsoft.com/office/drawing/2014/main" id="{C29101FB-113D-3C4C-3C63-D866145B9C96}"/>
-              </a:ext>
-            </a:extLst>
-          </p:cNvPr>
-          <p:cNvSpPr/>
-          <p:nvPr/>
-        </p:nvSpPr>
-        <p:spPr>
-          <a:xfrm>
-            <a:off x="7744968" y="4636008"/>
-            <a:ext cx="1371600" cy="164592"/>
-          </a:xfrm>
-          <a:prstGeom prst="rect">
-            <a:avLst/>
-          </a:prstGeom>
-          <a:noFill/>
-          <a:ln/>
-        </p:spPr>
-        <p:txBody>
-          <a:bodyPr wrap="square" lIns="0" tIns="0" rIns="0" bIns="0" rtlCol="0" anchor="ctr"/>
-          <a:lstStyle/>
-          <a:p>
-            <a:pPr algn="r"/>
-            <a:endParaRPr lang="en-US" sz="850" dirty="0">
-              <a:solidFill>
-                <a:srgbClr val="000000"/>
-              </a:solidFill>
-              <a:latin typeface="Arial" pitchFamily="34" charset="0"/>
-              <a:ea typeface="Arial" pitchFamily="34" charset="-122"/>
-              <a:cs typeface="Arial" pitchFamily="34" charset="-120"/>
-            </a:endParaRPr>
-          </a:p>
-          <a:p>
-            <a:pPr algn="r"/>
-            <a:endParaRPr lang="en-US" sz="850" dirty="0">
-              <a:solidFill>
-                <a:srgbClr val="000000"/>
-              </a:solidFill>
-              <a:latin typeface="Arial" pitchFamily="34" charset="0"/>
-              <a:ea typeface="Arial" pitchFamily="34" charset="-122"/>
-              <a:cs typeface="Arial" pitchFamily="34" charset="-120"/>
-            </a:endParaRPr>
-          </a:p>
-          <a:p>
-            <a:pPr algn="r"/>
-            <a:endParaRPr lang="en-US" sz="850" dirty="0">
-              <a:solidFill>
-                <a:srgbClr val="000000"/>
-              </a:solidFill>
-              <a:latin typeface="Arial" pitchFamily="34" charset="0"/>
-              <a:ea typeface="Arial" pitchFamily="34" charset="-122"/>
-              <a:cs typeface="Arial" pitchFamily="34" charset="-120"/>
-            </a:endParaRPr>
-          </a:p>
-          <a:p>
-            <a:pPr algn="r"/>
-            <a:r>
-              <a:rPr lang="en-US" sz="850" dirty="0">
-                <a:solidFill>
-                  <a:srgbClr val="000000"/>
-                </a:solidFill>
-                <a:latin typeface="Arial" pitchFamily="34" charset="0"/>
-                <a:ea typeface="Arial" pitchFamily="34" charset="-122"/>
-                <a:cs typeface="Arial" pitchFamily="34" charset="-120"/>
-              </a:rPr>
-              <a:t>18/03/2026</a:t>
-            </a:r>
-            <a:endParaRPr lang="en-US" sz="850" dirty="0"/>
-          </a:p>
-          <a:p>
-            <a:pPr marL="0" indent="0" algn="r">
-              <a:buNone/>
-            </a:pPr>
-            <a:endParaRPr lang="en-US" sz="850" dirty="0"/>
-          </a:p>
-        </p:txBody>
-      </p:sp>
-      <p:sp>
-        <p:nvSpPr>
           <p:cNvPr id="7" name="Text 4">
             <a:extLst>
               <a:ext uri="{FF2B5EF4-FFF2-40B4-BE49-F238E27FC236}">
@@ -12741,6 +12623,55 @@
           </a:prstGeom>
         </p:spPr>
       </p:pic>
+      <p:sp>
+        <p:nvSpPr>
+          <p:cNvPr id="8" name="Text 3">
+            <a:extLst>
+              <a:ext uri="{FF2B5EF4-FFF2-40B4-BE49-F238E27FC236}">
+                <a16:creationId xmlns:a16="http://schemas.microsoft.com/office/drawing/2014/main" id="{C1A7C969-C91C-E57D-2586-E469FD9FC3A3}"/>
+              </a:ext>
+            </a:extLst>
+          </p:cNvPr>
+          <p:cNvSpPr/>
+          <p:nvPr/>
+        </p:nvSpPr>
+        <p:spPr>
+          <a:xfrm>
+            <a:off x="7744968" y="4778703"/>
+            <a:ext cx="1371600" cy="164592"/>
+          </a:xfrm>
+          <a:prstGeom prst="rect">
+            <a:avLst/>
+          </a:prstGeom>
+          <a:noFill/>
+          <a:ln/>
+        </p:spPr>
+        <p:txBody>
+          <a:bodyPr wrap="square" lIns="0" tIns="0" rIns="0" bIns="0" rtlCol="0" anchor="ctr"/>
+          <a:lstStyle/>
+          <a:p>
+            <a:pPr algn="r"/>
+            <a:r>
+              <a:rPr lang="en-US" sz="850" dirty="0">
+                <a:solidFill>
+                  <a:srgbClr val="000000"/>
+                </a:solidFill>
+                <a:latin typeface="Arial" pitchFamily="34" charset="0"/>
+                <a:ea typeface="Arial" pitchFamily="34" charset="-122"/>
+                <a:cs typeface="Arial" pitchFamily="34" charset="-120"/>
+              </a:rPr>
+              <a:t>17/04/2026</a:t>
+            </a:r>
+            <a:endParaRPr lang="en-US" sz="850" dirty="0"/>
+          </a:p>
+          <a:p>
+            <a:pPr marL="0" indent="0" algn="r">
+              <a:buNone/>
+            </a:pPr>
+            <a:endParaRPr lang="en-US" sz="850" dirty="0"/>
+          </a:p>
+        </p:txBody>
+      </p:sp>
     </p:spTree>
     <p:extLst>
       <p:ext uri="{BB962C8B-B14F-4D97-AF65-F5344CB8AC3E}">
@@ -12938,88 +12869,6 @@
       </p:sp>
       <p:sp>
         <p:nvSpPr>
-          <p:cNvPr id="6" name="Text 3">
-            <a:extLst>
-              <a:ext uri="{FF2B5EF4-FFF2-40B4-BE49-F238E27FC236}">
-                <a16:creationId xmlns:a16="http://schemas.microsoft.com/office/drawing/2014/main" id="{F4BDA72E-1C56-3B0E-3B84-45A3E3C24A6F}"/>
-              </a:ext>
-            </a:extLst>
-          </p:cNvPr>
-          <p:cNvSpPr/>
-          <p:nvPr/>
-        </p:nvSpPr>
-        <p:spPr>
-          <a:xfrm>
-            <a:off x="7744968" y="4636008"/>
-            <a:ext cx="1371600" cy="164592"/>
-          </a:xfrm>
-          <a:prstGeom prst="rect">
-            <a:avLst/>
-          </a:prstGeom>
-          <a:noFill/>
-          <a:ln/>
-        </p:spPr>
-        <p:txBody>
-          <a:bodyPr wrap="square" lIns="0" tIns="0" rIns="0" bIns="0" rtlCol="0" anchor="ctr"/>
-          <a:lstStyle/>
-          <a:p>
-            <a:pPr algn="r"/>
-            <a:endParaRPr lang="en-US" sz="850" dirty="0">
-              <a:solidFill>
-                <a:srgbClr val="000000"/>
-              </a:solidFill>
-              <a:latin typeface="Arial" pitchFamily="34" charset="0"/>
-              <a:ea typeface="Arial" pitchFamily="34" charset="-122"/>
-              <a:cs typeface="Arial" pitchFamily="34" charset="-120"/>
-            </a:endParaRPr>
-          </a:p>
-          <a:p>
-            <a:pPr algn="r"/>
-            <a:endParaRPr lang="en-US" sz="850" dirty="0">
-              <a:solidFill>
-                <a:srgbClr val="000000"/>
-              </a:solidFill>
-              <a:latin typeface="Arial" pitchFamily="34" charset="0"/>
-              <a:ea typeface="Arial" pitchFamily="34" charset="-122"/>
-              <a:cs typeface="Arial" pitchFamily="34" charset="-120"/>
-            </a:endParaRPr>
-          </a:p>
-          <a:p>
-            <a:pPr algn="r"/>
-            <a:endParaRPr lang="en-US" sz="850" dirty="0">
-              <a:solidFill>
-                <a:srgbClr val="000000"/>
-              </a:solidFill>
-              <a:latin typeface="Arial" pitchFamily="34" charset="0"/>
-              <a:ea typeface="Arial" pitchFamily="34" charset="-122"/>
-              <a:cs typeface="Arial" pitchFamily="34" charset="-120"/>
-            </a:endParaRPr>
-          </a:p>
-          <a:p>
-            <a:pPr algn="r"/>
-            <a:r>
-              <a:rPr lang="en-US" sz="850" dirty="0">
-                <a:solidFill>
-                  <a:srgbClr val="000000"/>
-                </a:solidFill>
-                <a:latin typeface="Arial" pitchFamily="34" charset="0"/>
-                <a:ea typeface="Arial" pitchFamily="34" charset="-122"/>
-                <a:cs typeface="Arial" pitchFamily="34" charset="-120"/>
-              </a:rPr>
-              <a:t>18/03/2026</a:t>
-            </a:r>
-            <a:endParaRPr lang="en-US" sz="850" dirty="0"/>
-          </a:p>
-          <a:p>
-            <a:pPr marL="0" indent="0" algn="r">
-              <a:buNone/>
-            </a:pPr>
-            <a:endParaRPr lang="en-US" sz="850" dirty="0"/>
-          </a:p>
-        </p:txBody>
-      </p:sp>
-      <p:sp>
-        <p:nvSpPr>
           <p:cNvPr id="7" name="Text 4">
             <a:extLst>
               <a:ext uri="{FF2B5EF4-FFF2-40B4-BE49-F238E27FC236}">
@@ -13274,6 +13123,55 @@
           </a:prstGeom>
         </p:spPr>
       </p:pic>
+      <p:sp>
+        <p:nvSpPr>
+          <p:cNvPr id="8" name="Text 3">
+            <a:extLst>
+              <a:ext uri="{FF2B5EF4-FFF2-40B4-BE49-F238E27FC236}">
+                <a16:creationId xmlns:a16="http://schemas.microsoft.com/office/drawing/2014/main" id="{F2FC622A-7193-64FC-862A-19AE78074550}"/>
+              </a:ext>
+            </a:extLst>
+          </p:cNvPr>
+          <p:cNvSpPr/>
+          <p:nvPr/>
+        </p:nvSpPr>
+        <p:spPr>
+          <a:xfrm>
+            <a:off x="7741359" y="4810466"/>
+            <a:ext cx="1371600" cy="164592"/>
+          </a:xfrm>
+          <a:prstGeom prst="rect">
+            <a:avLst/>
+          </a:prstGeom>
+          <a:noFill/>
+          <a:ln/>
+        </p:spPr>
+        <p:txBody>
+          <a:bodyPr wrap="square" lIns="0" tIns="0" rIns="0" bIns="0" rtlCol="0" anchor="ctr"/>
+          <a:lstStyle/>
+          <a:p>
+            <a:pPr algn="r"/>
+            <a:r>
+              <a:rPr lang="en-US" sz="850" dirty="0">
+                <a:solidFill>
+                  <a:srgbClr val="000000"/>
+                </a:solidFill>
+                <a:latin typeface="Arial" pitchFamily="34" charset="0"/>
+                <a:ea typeface="Arial" pitchFamily="34" charset="-122"/>
+                <a:cs typeface="Arial" pitchFamily="34" charset="-120"/>
+              </a:rPr>
+              <a:t>17/04/2026</a:t>
+            </a:r>
+            <a:endParaRPr lang="en-US" sz="850" dirty="0"/>
+          </a:p>
+          <a:p>
+            <a:pPr marL="0" indent="0" algn="r">
+              <a:buNone/>
+            </a:pPr>
+            <a:endParaRPr lang="en-US" sz="850" dirty="0"/>
+          </a:p>
+        </p:txBody>
+      </p:sp>
     </p:spTree>
     <p:extLst>
       <p:ext uri="{BB962C8B-B14F-4D97-AF65-F5344CB8AC3E}">
@@ -13530,17 +13428,6 @@
           </a:p>
           <a:p>
             <a:pPr algn="r"/>
-            <a:r>
-              <a:rPr lang="en-US" sz="850" dirty="0">
-                <a:solidFill>
-                  <a:srgbClr val="000000"/>
-                </a:solidFill>
-                <a:latin typeface="Arial" pitchFamily="34" charset="0"/>
-                <a:ea typeface="Arial" pitchFamily="34" charset="-122"/>
-                <a:cs typeface="Arial" pitchFamily="34" charset="-120"/>
-              </a:rPr>
-              <a:t>18/03/2026</a:t>
-            </a:r>
             <a:endParaRPr lang="en-US" sz="850" dirty="0"/>
           </a:p>
           <a:p>
@@ -13773,6 +13660,55 @@
           </a:prstGeom>
         </p:spPr>
       </p:pic>
+      <p:sp>
+        <p:nvSpPr>
+          <p:cNvPr id="8" name="Text 3">
+            <a:extLst>
+              <a:ext uri="{FF2B5EF4-FFF2-40B4-BE49-F238E27FC236}">
+                <a16:creationId xmlns:a16="http://schemas.microsoft.com/office/drawing/2014/main" id="{92F80976-7D6F-D4C4-D08C-D2AB3926FBF8}"/>
+              </a:ext>
+            </a:extLst>
+          </p:cNvPr>
+          <p:cNvSpPr/>
+          <p:nvPr/>
+        </p:nvSpPr>
+        <p:spPr>
+          <a:xfrm>
+            <a:off x="7575804" y="4782312"/>
+            <a:ext cx="1371600" cy="164592"/>
+          </a:xfrm>
+          <a:prstGeom prst="rect">
+            <a:avLst/>
+          </a:prstGeom>
+          <a:noFill/>
+          <a:ln/>
+        </p:spPr>
+        <p:txBody>
+          <a:bodyPr wrap="square" lIns="0" tIns="0" rIns="0" bIns="0" rtlCol="0" anchor="ctr"/>
+          <a:lstStyle/>
+          <a:p>
+            <a:pPr algn="r"/>
+            <a:r>
+              <a:rPr lang="en-US" sz="850" dirty="0">
+                <a:solidFill>
+                  <a:srgbClr val="000000"/>
+                </a:solidFill>
+                <a:latin typeface="Arial" pitchFamily="34" charset="0"/>
+                <a:ea typeface="Arial" pitchFamily="34" charset="-122"/>
+                <a:cs typeface="Arial" pitchFamily="34" charset="-120"/>
+              </a:rPr>
+              <a:t>17/04/2026</a:t>
+            </a:r>
+            <a:endParaRPr lang="en-US" sz="850" dirty="0"/>
+          </a:p>
+          <a:p>
+            <a:pPr marL="0" indent="0" algn="r">
+              <a:buNone/>
+            </a:pPr>
+            <a:endParaRPr lang="en-US" sz="850" dirty="0"/>
+          </a:p>
+        </p:txBody>
+      </p:sp>
     </p:spTree>
     <p:extLst>
       <p:ext uri="{BB962C8B-B14F-4D97-AF65-F5344CB8AC3E}">
@@ -13940,49 +13876,6 @@
       </p:sp>
       <p:sp>
         <p:nvSpPr>
-          <p:cNvPr id="6" name="Text 3"/>
-          <p:cNvSpPr/>
-          <p:nvPr/>
-        </p:nvSpPr>
-        <p:spPr>
-          <a:xfrm>
-            <a:off x="7744968" y="4636008"/>
-            <a:ext cx="1371600" cy="164592"/>
-          </a:xfrm>
-          <a:prstGeom prst="rect">
-            <a:avLst/>
-          </a:prstGeom>
-          <a:noFill/>
-          <a:ln/>
-        </p:spPr>
-        <p:txBody>
-          <a:bodyPr wrap="square" lIns="0" tIns="0" rIns="0" bIns="0" rtlCol="0" anchor="ctr"/>
-          <a:lstStyle/>
-          <a:p>
-            <a:pPr algn="r"/>
-            <a:r>
-              <a:rPr lang="en-US" sz="850" dirty="0">
-                <a:solidFill>
-                  <a:srgbClr val="000000"/>
-                </a:solidFill>
-                <a:latin typeface="Arial" pitchFamily="34" charset="0"/>
-                <a:ea typeface="Arial" pitchFamily="34" charset="-122"/>
-                <a:cs typeface="Arial" pitchFamily="34" charset="-120"/>
-              </a:rPr>
-              <a:t>18/03/2026</a:t>
-            </a:r>
-            <a:endParaRPr lang="en-US" sz="850" dirty="0"/>
-          </a:p>
-          <a:p>
-            <a:pPr marL="0" indent="0" algn="r">
-              <a:buNone/>
-            </a:pPr>
-            <a:endParaRPr lang="en-US" sz="850" dirty="0"/>
-          </a:p>
-        </p:txBody>
-      </p:sp>
-      <p:sp>
-        <p:nvSpPr>
           <p:cNvPr id="7" name="Text 4"/>
           <p:cNvSpPr/>
           <p:nvPr/>
@@ -14028,7 +13921,7 @@
         </p:nvSpPr>
         <p:spPr>
           <a:xfrm>
-            <a:off x="194767" y="694944"/>
+            <a:off x="194767" y="688928"/>
             <a:ext cx="8686800" cy="3886200"/>
           </a:xfrm>
           <a:prstGeom prst="rect">
@@ -14199,6 +14092,55 @@
               <a:t>8.  CIS Benchmarks for Amazon Web Services. Center for Internet Security, 2024. https://www.cisecurity.org/cis-benchmarks</a:t>
             </a:r>
             <a:endParaRPr lang="en-US" sz="1050" dirty="0"/>
+          </a:p>
+        </p:txBody>
+      </p:sp>
+      <p:sp>
+        <p:nvSpPr>
+          <p:cNvPr id="10" name="Text 3">
+            <a:extLst>
+              <a:ext uri="{FF2B5EF4-FFF2-40B4-BE49-F238E27FC236}">
+                <a16:creationId xmlns:a16="http://schemas.microsoft.com/office/drawing/2014/main" id="{48F53817-008E-49F8-203B-E8CB5C3F24EA}"/>
+              </a:ext>
+            </a:extLst>
+          </p:cNvPr>
+          <p:cNvSpPr/>
+          <p:nvPr/>
+        </p:nvSpPr>
+        <p:spPr>
+          <a:xfrm>
+            <a:off x="7744968" y="4593896"/>
+            <a:ext cx="1371600" cy="164592"/>
+          </a:xfrm>
+          <a:prstGeom prst="rect">
+            <a:avLst/>
+          </a:prstGeom>
+          <a:noFill/>
+          <a:ln/>
+        </p:spPr>
+        <p:txBody>
+          <a:bodyPr wrap="square" lIns="0" tIns="0" rIns="0" bIns="0" rtlCol="0" anchor="ctr"/>
+          <a:lstStyle/>
+          <a:p>
+            <a:pPr algn="r"/>
+            <a:r>
+              <a:rPr lang="en-US" sz="850" dirty="0">
+                <a:solidFill>
+                  <a:srgbClr val="000000"/>
+                </a:solidFill>
+                <a:latin typeface="Arial" pitchFamily="34" charset="0"/>
+                <a:ea typeface="Arial" pitchFamily="34" charset="-122"/>
+                <a:cs typeface="Arial" pitchFamily="34" charset="-120"/>
+              </a:rPr>
+              <a:t>17/04/2026</a:t>
+            </a:r>
+            <a:endParaRPr lang="en-US" sz="850" dirty="0"/>
+          </a:p>
+          <a:p>
+            <a:pPr marL="0" indent="0" algn="r">
+              <a:buNone/>
+            </a:pPr>
+            <a:endParaRPr lang="en-US" sz="850" dirty="0"/>
           </a:p>
         </p:txBody>
       </p:sp>
@@ -14393,7 +14335,7 @@
                 <a:ea typeface="Arial" pitchFamily="34" charset="-122"/>
                 <a:cs typeface="Arial" pitchFamily="34" charset="-120"/>
               </a:rPr>
-              <a:t>18/03/2026</a:t>
+              <a:t>17/04/2026</a:t>
             </a:r>
             <a:endParaRPr lang="en-US" sz="850" dirty="0"/>
           </a:p>
@@ -14596,8 +14538,12 @@
                 <a:ea typeface="Arial" pitchFamily="34" charset="-122"/>
                 <a:cs typeface="Arial" pitchFamily="34" charset="-120"/>
               </a:rPr>
-              <a:t>18/03/2026</a:t>
-            </a:r>
+              <a:t>17/04/2026</a:t>
+            </a:r>
+            <a:endParaRPr lang="en-US" sz="850" dirty="0"/>
+          </a:p>
+          <a:p>
+            <a:pPr algn="r"/>
             <a:endParaRPr lang="en-US" sz="850" dirty="0"/>
           </a:p>
           <a:p>
@@ -15858,7 +15804,7 @@
         </p:nvSpPr>
         <p:spPr>
           <a:xfrm>
-            <a:off x="7744968" y="4636008"/>
+            <a:off x="7744968" y="4741139"/>
             <a:ext cx="1371600" cy="164592"/>
           </a:xfrm>
           <a:prstGeom prst="rect">
@@ -15881,8 +15827,12 @@
                 <a:ea typeface="Arial" pitchFamily="34" charset="-122"/>
                 <a:cs typeface="Arial" pitchFamily="34" charset="-120"/>
               </a:rPr>
-              <a:t>18/03/2026</a:t>
-            </a:r>
+              <a:t>17/04/2026</a:t>
+            </a:r>
+            <a:endParaRPr lang="en-US" sz="850" dirty="0"/>
+          </a:p>
+          <a:p>
+            <a:pPr algn="r"/>
             <a:endParaRPr lang="en-US" sz="850" dirty="0"/>
           </a:p>
           <a:p>
@@ -15953,11 +15903,12 @@
           <a:bodyPr wrap="square" rtlCol="0" anchor="ctr"/>
           <a:lstStyle/>
           <a:p>
-            <a:pPr marL="0" indent="0">
-              <a:buNone/>
-            </a:pPr>
-            <a:r>
-              <a:rPr lang="en-US" sz="1300" dirty="0">
+            <a:pPr marL="285750" indent="-285750">
+              <a:buFont typeface="Arial" panose="020B0604020202020204" pitchFamily="34" charset="0"/>
+              <a:buChar char="•"/>
+            </a:pPr>
+            <a:r>
+              <a:rPr lang="en-US" sz="1600" dirty="0">
                 <a:solidFill>
                   <a:srgbClr val="1F1F1F"/>
                 </a:solidFill>
@@ -15968,7 +15919,7 @@
               <a:t>The rapid growth of </a:t>
             </a:r>
             <a:r>
-              <a:rPr lang="en-US" sz="1300" b="1" dirty="0">
+              <a:rPr lang="en-US" sz="1600" b="1" dirty="0">
                 <a:solidFill>
                   <a:srgbClr val="1F1F1F"/>
                 </a:solidFill>
@@ -15979,7 +15930,7 @@
               <a:t>Infrastructure-as-Code (IaC)</a:t>
             </a:r>
             <a:r>
-              <a:rPr lang="en-US" sz="1300" dirty="0">
+              <a:rPr lang="en-US" sz="1600" dirty="0">
                 <a:solidFill>
                   <a:srgbClr val="1F1F1F"/>
                 </a:solidFill>
@@ -15989,20 +15940,22 @@
               </a:rPr>
               <a:t> in cloud-native environments has created serious security risks, as small misconfigurations in templates can lead to major data breaches.</a:t>
             </a:r>
-            <a:endParaRPr lang="en-US" sz="1300" dirty="0"/>
-          </a:p>
-          <a:p>
-            <a:pPr marL="0" indent="0">
-              <a:buNone/>
-            </a:pPr>
-            <a:endParaRPr lang="en-US" sz="1300" dirty="0"/>
-          </a:p>
-          <a:p>
-            <a:pPr marL="0" indent="0">
-              <a:buNone/>
-            </a:pPr>
-            <a:r>
-              <a:rPr lang="en-US" sz="1300" dirty="0">
+            <a:endParaRPr lang="en-US" sz="1600" dirty="0"/>
+          </a:p>
+          <a:p>
+            <a:pPr marL="285750" indent="-285750">
+              <a:buFont typeface="Arial" panose="020B0604020202020204" pitchFamily="34" charset="0"/>
+              <a:buChar char="•"/>
+            </a:pPr>
+            <a:endParaRPr lang="en-US" sz="1600" dirty="0"/>
+          </a:p>
+          <a:p>
+            <a:pPr marL="285750" indent="-285750">
+              <a:buFont typeface="Arial" panose="020B0604020202020204" pitchFamily="34" charset="0"/>
+              <a:buChar char="•"/>
+            </a:pPr>
+            <a:r>
+              <a:rPr lang="en-US" sz="1600" dirty="0">
                 <a:solidFill>
                   <a:srgbClr val="1F1F1F"/>
                 </a:solidFill>
@@ -16012,14 +15965,15 @@
               </a:rPr>
               <a:t>As cloud systems become more complex, it becomes harder for developers to identify </a:t>
             </a:r>
-            <a:endParaRPr lang="en-US" sz="1300" dirty="0"/>
-          </a:p>
-          <a:p>
-            <a:pPr marL="0" indent="0">
-              <a:buNone/>
-            </a:pPr>
-            <a:r>
-              <a:rPr lang="en-US" sz="1300" b="1" dirty="0">
+            <a:endParaRPr lang="en-US" sz="1600" dirty="0"/>
+          </a:p>
+          <a:p>
+            <a:pPr marL="285750" indent="-285750">
+              <a:buFont typeface="Arial" panose="020B0604020202020204" pitchFamily="34" charset="0"/>
+              <a:buChar char="•"/>
+            </a:pPr>
+            <a:r>
+              <a:rPr lang="en-US" sz="1600" b="1" dirty="0">
                 <a:solidFill>
                   <a:srgbClr val="1F1F1F"/>
                 </a:solidFill>
@@ -16030,7 +15984,7 @@
               <a:t>hidden and context-specific vulnerabilities</a:t>
             </a:r>
             <a:r>
-              <a:rPr lang="en-US" sz="1300" dirty="0">
+              <a:rPr lang="en-US" sz="1600" dirty="0">
                 <a:solidFill>
                   <a:srgbClr val="1F1F1F"/>
                 </a:solidFill>
@@ -16040,20 +15994,22 @@
               </a:rPr>
               <a:t> using traditional security tools.</a:t>
             </a:r>
-            <a:endParaRPr lang="en-US" sz="1300" dirty="0"/>
-          </a:p>
-          <a:p>
-            <a:pPr marL="0" indent="0">
-              <a:buNone/>
-            </a:pPr>
-            <a:endParaRPr lang="en-US" sz="1300" dirty="0"/>
-          </a:p>
-          <a:p>
-            <a:pPr marL="0" indent="0">
-              <a:buNone/>
-            </a:pPr>
-            <a:r>
-              <a:rPr lang="en-US" sz="1300" dirty="0">
+            <a:endParaRPr lang="en-US" sz="1600" dirty="0"/>
+          </a:p>
+          <a:p>
+            <a:pPr marL="285750" indent="-285750">
+              <a:buFont typeface="Arial" panose="020B0604020202020204" pitchFamily="34" charset="0"/>
+              <a:buChar char="•"/>
+            </a:pPr>
+            <a:endParaRPr lang="en-US" sz="1600" dirty="0"/>
+          </a:p>
+          <a:p>
+            <a:pPr marL="285750" indent="-285750">
+              <a:buFont typeface="Arial" panose="020B0604020202020204" pitchFamily="34" charset="0"/>
+              <a:buChar char="•"/>
+            </a:pPr>
+            <a:r>
+              <a:rPr lang="en-US" sz="1600" dirty="0">
                 <a:solidFill>
                   <a:srgbClr val="1F1F1F"/>
                 </a:solidFill>
@@ -16061,16 +16017,17 @@
                 <a:ea typeface="Arial" pitchFamily="34" charset="-122"/>
                 <a:cs typeface="Arial" pitchFamily="34" charset="-120"/>
               </a:rPr>
-              <a:t>Current vulnerability detection methods mainly rely on </a:t>
-            </a:r>
-            <a:endParaRPr lang="en-US" sz="1300" dirty="0"/>
-          </a:p>
-          <a:p>
-            <a:pPr marL="0" indent="0">
-              <a:buNone/>
-            </a:pPr>
-            <a:r>
-              <a:rPr lang="en-US" sz="1300" b="1" dirty="0">
+              <a:t>This project implements a </a:t>
+            </a:r>
+            <a:endParaRPr lang="en-US" sz="1600" dirty="0"/>
+          </a:p>
+          <a:p>
+            <a:pPr marL="285750" indent="-285750">
+              <a:buFont typeface="Arial" panose="020B0604020202020204" pitchFamily="34" charset="0"/>
+              <a:buChar char="•"/>
+            </a:pPr>
+            <a:r>
+              <a:rPr lang="en-US" sz="1600" b="1" dirty="0">
                 <a:solidFill>
                   <a:srgbClr val="1F1F1F"/>
                 </a:solidFill>
@@ -16078,10 +16035,10 @@
                 <a:ea typeface="Arial" pitchFamily="34" charset="-122"/>
                 <a:cs typeface="Arial" pitchFamily="34" charset="-120"/>
               </a:rPr>
-              <a:t>static analysis tools, rule-based systems</a:t>
-            </a:r>
-            <a:r>
-              <a:rPr lang="en-US" sz="1300" dirty="0">
+              <a:t>multi-agent AI workflow</a:t>
+            </a:r>
+            <a:r>
+              <a:rPr lang="en-US" sz="1600" dirty="0">
                 <a:solidFill>
                   <a:srgbClr val="1F1F1F"/>
                 </a:solidFill>
@@ -16089,10 +16046,10 @@
                 <a:ea typeface="Arial" pitchFamily="34" charset="-122"/>
                 <a:cs typeface="Arial" pitchFamily="34" charset="-120"/>
               </a:rPr>
-              <a:t> (such as CDK-Nag), and dynamic runtime analysis. These tools fail to detect interdependent or complex vulnerabilities and produce high </a:t>
-            </a:r>
-            <a:r>
-              <a:rPr lang="en-US" sz="1300" b="1" dirty="0">
+              <a:t> using LLMs and </a:t>
+            </a:r>
+            <a:r>
+              <a:rPr lang="en-US" sz="1600" b="1" dirty="0">
                 <a:solidFill>
                   <a:srgbClr val="1F1F1F"/>
                 </a:solidFill>
@@ -16100,10 +16057,10 @@
                 <a:ea typeface="Arial" pitchFamily="34" charset="-122"/>
                 <a:cs typeface="Arial" pitchFamily="34" charset="-120"/>
               </a:rPr>
-              <a:t>false positives</a:t>
-            </a:r>
-            <a:r>
-              <a:rPr lang="en-US" sz="1300" dirty="0">
+              <a:t>Retrieval-Augmented Generation (RAG)</a:t>
+            </a:r>
+            <a:r>
+              <a:rPr lang="en-US" sz="1600" dirty="0">
                 <a:solidFill>
                   <a:srgbClr val="1F1F1F"/>
                 </a:solidFill>
@@ -16111,22 +16068,10 @@
                 <a:ea typeface="Arial" pitchFamily="34" charset="-122"/>
                 <a:cs typeface="Arial" pitchFamily="34" charset="-120"/>
               </a:rPr>
-              <a:t> because they cannot understand infrastructure context.</a:t>
-            </a:r>
-            <a:endParaRPr lang="en-US" sz="1300" dirty="0"/>
-          </a:p>
-          <a:p>
-            <a:pPr marL="0" indent="0">
-              <a:buNone/>
-            </a:pPr>
-            <a:endParaRPr lang="en-US" sz="1300" dirty="0"/>
-          </a:p>
-          <a:p>
-            <a:pPr marL="0" indent="0">
-              <a:buNone/>
-            </a:pPr>
-            <a:r>
-              <a:rPr lang="en-US" sz="1300" dirty="0">
+              <a:t>. The RAG module (50% complete) embeds AWS CIS Benchmark security best practices into a </a:t>
+            </a:r>
+            <a:r>
+              <a:rPr lang="en-US" sz="1600" b="1" dirty="0">
                 <a:solidFill>
                   <a:srgbClr val="1F1F1F"/>
                 </a:solidFill>
@@ -16134,16 +16079,10 @@
                 <a:ea typeface="Arial" pitchFamily="34" charset="-122"/>
                 <a:cs typeface="Arial" pitchFamily="34" charset="-120"/>
               </a:rPr>
-              <a:t>This project implements a </a:t>
-            </a:r>
-            <a:endParaRPr lang="en-US" sz="1300" dirty="0"/>
-          </a:p>
-          <a:p>
-            <a:pPr marL="0" indent="0">
-              <a:buNone/>
-            </a:pPr>
-            <a:r>
-              <a:rPr lang="en-US" sz="1300" b="1" dirty="0">
+              <a:t>Amazon Bedrock</a:t>
+            </a:r>
+            <a:r>
+              <a:rPr lang="en-US" sz="1600" dirty="0">
                 <a:solidFill>
                   <a:srgbClr val="1F1F1F"/>
                 </a:solidFill>
@@ -16151,10 +16090,10 @@
                 <a:ea typeface="Arial" pitchFamily="34" charset="-122"/>
                 <a:cs typeface="Arial" pitchFamily="34" charset="-120"/>
               </a:rPr>
-              <a:t>multi-agent AI workflow</a:t>
-            </a:r>
-            <a:r>
-              <a:rPr lang="en-US" sz="1300" dirty="0">
+              <a:t> (Claude 3.5 Sonnet V2) and a </a:t>
+            </a:r>
+            <a:r>
+              <a:rPr lang="en-US" sz="1600" b="1" dirty="0">
                 <a:solidFill>
                   <a:srgbClr val="1F1F1F"/>
                 </a:solidFill>
@@ -16162,10 +16101,10 @@
                 <a:ea typeface="Arial" pitchFamily="34" charset="-122"/>
                 <a:cs typeface="Arial" pitchFamily="34" charset="-120"/>
               </a:rPr>
-              <a:t> using LLMs and </a:t>
-            </a:r>
-            <a:r>
-              <a:rPr lang="en-US" sz="1300" b="1" dirty="0">
+              <a:t>Pinecone vector store</a:t>
+            </a:r>
+            <a:r>
+              <a:rPr lang="en-US" sz="1600" dirty="0">
                 <a:solidFill>
                   <a:srgbClr val="1F1F1F"/>
                 </a:solidFill>
@@ -16173,10 +16112,10 @@
                 <a:ea typeface="Arial" pitchFamily="34" charset="-122"/>
                 <a:cs typeface="Arial" pitchFamily="34" charset="-120"/>
               </a:rPr>
-              <a:t>Retrieval-Augmented Generation (RAG)</a:t>
-            </a:r>
-            <a:r>
-              <a:rPr lang="en-US" sz="1300" dirty="0">
+              <a:t> using Amazon Titan Text Embeddings V2, and successfully retrieves relevant security context for CloudFormation templates. The </a:t>
+            </a:r>
+            <a:r>
+              <a:rPr lang="en-US" sz="1600" b="1" dirty="0">
                 <a:solidFill>
                   <a:srgbClr val="1F1F1F"/>
                 </a:solidFill>
@@ -16184,10 +16123,10 @@
                 <a:ea typeface="Arial" pitchFamily="34" charset="-122"/>
                 <a:cs typeface="Arial" pitchFamily="34" charset="-120"/>
               </a:rPr>
-              <a:t>. The RAG module (50% complete) embeds AWS CIS Benchmark security best practices into a </a:t>
-            </a:r>
-            <a:r>
-              <a:rPr lang="en-US" sz="1300" b="1" dirty="0">
+              <a:t>Vulnerability Detection Agent, Remediation Engine, and Report Generator</a:t>
+            </a:r>
+            <a:r>
+              <a:rPr lang="en-US" sz="1600" dirty="0">
                 <a:solidFill>
                   <a:srgbClr val="1F1F1F"/>
                 </a:solidFill>
@@ -16195,64 +16134,9 @@
                 <a:ea typeface="Arial" pitchFamily="34" charset="-122"/>
                 <a:cs typeface="Arial" pitchFamily="34" charset="-120"/>
               </a:rPr>
-              <a:t>Amazon Bedrock</a:t>
-            </a:r>
-            <a:r>
-              <a:rPr lang="en-US" sz="1300" dirty="0">
-                <a:solidFill>
-                  <a:srgbClr val="1F1F1F"/>
-                </a:solidFill>
-                <a:latin typeface="Arial" pitchFamily="34" charset="0"/>
-                <a:ea typeface="Arial" pitchFamily="34" charset="-122"/>
-                <a:cs typeface="Arial" pitchFamily="34" charset="-120"/>
-              </a:rPr>
-              <a:t> (Claude 3.5 Sonnet V2) and a </a:t>
-            </a:r>
-            <a:r>
-              <a:rPr lang="en-US" sz="1300" b="1" dirty="0">
-                <a:solidFill>
-                  <a:srgbClr val="1F1F1F"/>
-                </a:solidFill>
-                <a:latin typeface="Arial" pitchFamily="34" charset="0"/>
-                <a:ea typeface="Arial" pitchFamily="34" charset="-122"/>
-                <a:cs typeface="Arial" pitchFamily="34" charset="-120"/>
-              </a:rPr>
-              <a:t>Pinecone vector store</a:t>
-            </a:r>
-            <a:r>
-              <a:rPr lang="en-US" sz="1300" dirty="0">
-                <a:solidFill>
-                  <a:srgbClr val="1F1F1F"/>
-                </a:solidFill>
-                <a:latin typeface="Arial" pitchFamily="34" charset="0"/>
-                <a:ea typeface="Arial" pitchFamily="34" charset="-122"/>
-                <a:cs typeface="Arial" pitchFamily="34" charset="-120"/>
-              </a:rPr>
-              <a:t> using Amazon Titan Text Embeddings V2, and successfully retrieves relevant security context for CloudFormation templates. The </a:t>
-            </a:r>
-            <a:r>
-              <a:rPr lang="en-US" sz="1300" b="1" dirty="0">
-                <a:solidFill>
-                  <a:srgbClr val="1F1F1F"/>
-                </a:solidFill>
-                <a:latin typeface="Arial" pitchFamily="34" charset="0"/>
-                <a:ea typeface="Arial" pitchFamily="34" charset="-122"/>
-                <a:cs typeface="Arial" pitchFamily="34" charset="-120"/>
-              </a:rPr>
-              <a:t>Vulnerability Detection Agent, Remediation Engine, and Report Generator</a:t>
-            </a:r>
-            <a:r>
-              <a:rPr lang="en-US" sz="1300" dirty="0">
-                <a:solidFill>
-                  <a:srgbClr val="1F1F1F"/>
-                </a:solidFill>
-                <a:latin typeface="Arial" pitchFamily="34" charset="0"/>
-                <a:ea typeface="Arial" pitchFamily="34" charset="-122"/>
-                <a:cs typeface="Arial" pitchFamily="34" charset="-120"/>
-              </a:rPr>
               <a:t> are the next implementation phase.</a:t>
             </a:r>
-            <a:endParaRPr lang="en-US" sz="1300" dirty="0"/>
+            <a:endParaRPr lang="en-US" sz="1600" dirty="0"/>
           </a:p>
         </p:txBody>
       </p:sp>
@@ -16424,7 +16308,7 @@
         </p:nvSpPr>
         <p:spPr>
           <a:xfrm>
-            <a:off x="7744968" y="4636008"/>
+            <a:off x="7699248" y="4866163"/>
             <a:ext cx="1371600" cy="164592"/>
           </a:xfrm>
           <a:prstGeom prst="rect">
@@ -16447,8 +16331,12 @@
                 <a:ea typeface="Arial" pitchFamily="34" charset="-122"/>
                 <a:cs typeface="Arial" pitchFamily="34" charset="-120"/>
               </a:rPr>
-              <a:t>18/03/2026</a:t>
-            </a:r>
+              <a:t>17/04/2026</a:t>
+            </a:r>
+            <a:endParaRPr lang="en-US" sz="850" dirty="0"/>
+          </a:p>
+          <a:p>
+            <a:pPr algn="r"/>
             <a:endParaRPr lang="en-US" sz="850" dirty="0"/>
           </a:p>
           <a:p>
@@ -16520,6 +16408,9 @@
           <a:lstStyle/>
           <a:p>
             <a:pPr marL="342900" indent="-342900">
+              <a:lnSpc>
+                <a:spcPct val="150000"/>
+              </a:lnSpc>
               <a:spcAft>
                 <a:spcPts val="400"/>
               </a:spcAft>
@@ -16541,6 +16432,9 @@
           </a:p>
           <a:p>
             <a:pPr marL="342900" indent="-342900">
+              <a:lnSpc>
+                <a:spcPct val="150000"/>
+              </a:lnSpc>
               <a:spcAft>
                 <a:spcPts val="400"/>
               </a:spcAft>
@@ -16562,6 +16456,9 @@
           </a:p>
           <a:p>
             <a:pPr marL="342900" indent="-342900">
+              <a:lnSpc>
+                <a:spcPct val="150000"/>
+              </a:lnSpc>
               <a:spcAft>
                 <a:spcPts val="400"/>
               </a:spcAft>
@@ -16583,27 +16480,9 @@
           </a:p>
           <a:p>
             <a:pPr marL="342900" indent="-342900">
-              <a:spcAft>
-                <a:spcPts val="400"/>
-              </a:spcAft>
-              <a:buSzPct val="100000"/>
-              <a:buChar char="•"/>
-            </a:pPr>
-            <a:r>
-              <a:rPr lang="en-US" sz="1300" dirty="0">
-                <a:solidFill>
-                  <a:srgbClr val="1F1F1F"/>
-                </a:solidFill>
-                <a:latin typeface="Arial" pitchFamily="34" charset="0"/>
-                <a:ea typeface="Arial" pitchFamily="34" charset="-122"/>
-                <a:cs typeface="Arial" pitchFamily="34" charset="-120"/>
-              </a:rPr>
-              <a:t>Problem of False Positives: Existing tools generate many false positives, overloading developers with unnecessary alerts and causing "alert fatigue" that reduces overall security posture.</a:t>
-            </a:r>
-            <a:endParaRPr lang="en-US" sz="1300" dirty="0"/>
-          </a:p>
-          <a:p>
-            <a:pPr marL="342900" indent="-342900">
+              <a:lnSpc>
+                <a:spcPct val="150000"/>
+              </a:lnSpc>
               <a:spcAft>
                 <a:spcPts val="400"/>
               </a:spcAft>
@@ -16793,7 +16672,7 @@
         </p:nvSpPr>
         <p:spPr>
           <a:xfrm>
-            <a:off x="7744968" y="4636008"/>
+            <a:off x="7699248" y="4866163"/>
             <a:ext cx="1371600" cy="164592"/>
           </a:xfrm>
           <a:prstGeom prst="rect">
@@ -16807,39 +16686,21 @@
           <a:lstStyle/>
           <a:p>
             <a:pPr algn="r"/>
-            <a:endParaRPr lang="en-US" sz="850" dirty="0">
-              <a:solidFill>
-                <a:srgbClr val="000000"/>
-              </a:solidFill>
-              <a:latin typeface="Arial" pitchFamily="34" charset="0"/>
-              <a:ea typeface="Arial" pitchFamily="34" charset="-122"/>
-              <a:cs typeface="Arial" pitchFamily="34" charset="-120"/>
-            </a:endParaRPr>
+            <a:r>
+              <a:rPr lang="en-US" sz="850" dirty="0">
+                <a:solidFill>
+                  <a:srgbClr val="000000"/>
+                </a:solidFill>
+                <a:latin typeface="Arial" pitchFamily="34" charset="0"/>
+                <a:ea typeface="Arial" pitchFamily="34" charset="-122"/>
+                <a:cs typeface="Arial" pitchFamily="34" charset="-120"/>
+              </a:rPr>
+              <a:t>17/04/2026</a:t>
+            </a:r>
+            <a:endParaRPr lang="en-US" sz="850" dirty="0"/>
           </a:p>
           <a:p>
             <a:pPr algn="r"/>
-            <a:endParaRPr lang="en-US" sz="850" dirty="0">
-              <a:solidFill>
-                <a:srgbClr val="000000"/>
-              </a:solidFill>
-              <a:latin typeface="Arial" pitchFamily="34" charset="0"/>
-              <a:ea typeface="Arial" pitchFamily="34" charset="-122"/>
-              <a:cs typeface="Arial" pitchFamily="34" charset="-120"/>
-            </a:endParaRPr>
-          </a:p>
-          <a:p>
-            <a:pPr algn="r"/>
-            <a:r>
-              <a:rPr lang="en-US" sz="850" dirty="0">
-                <a:solidFill>
-                  <a:srgbClr val="000000"/>
-                </a:solidFill>
-                <a:latin typeface="Arial" pitchFamily="34" charset="0"/>
-                <a:ea typeface="Arial" pitchFamily="34" charset="-122"/>
-                <a:cs typeface="Arial" pitchFamily="34" charset="-120"/>
-              </a:rPr>
-              <a:t>18/03/2026</a:t>
-            </a:r>
             <a:endParaRPr lang="en-US" sz="850" dirty="0"/>
           </a:p>
           <a:p>
@@ -18634,7 +18495,7 @@
         </p:nvSpPr>
         <p:spPr>
           <a:xfrm>
-            <a:off x="7744968" y="4636008"/>
+            <a:off x="7699248" y="4867687"/>
             <a:ext cx="1371600" cy="164592"/>
           </a:xfrm>
           <a:prstGeom prst="rect">
@@ -18647,46 +18508,22 @@
           <a:bodyPr wrap="square" lIns="0" tIns="0" rIns="0" bIns="0" rtlCol="0" anchor="ctr"/>
           <a:lstStyle/>
           <a:p>
-            <a:pPr marL="0" indent="0" algn="r">
-              <a:buNone/>
-            </a:pPr>
+            <a:pPr algn="r"/>
+            <a:r>
+              <a:rPr lang="en-US" sz="850" dirty="0">
+                <a:solidFill>
+                  <a:srgbClr val="000000"/>
+                </a:solidFill>
+                <a:latin typeface="Arial" pitchFamily="34" charset="0"/>
+                <a:ea typeface="Arial" pitchFamily="34" charset="-122"/>
+                <a:cs typeface="Arial" pitchFamily="34" charset="-120"/>
+              </a:rPr>
+              <a:t>17/04/2026</a:t>
+            </a:r>
             <a:endParaRPr lang="en-US" sz="850" dirty="0"/>
           </a:p>
           <a:p>
             <a:pPr algn="r"/>
-            <a:endParaRPr lang="en-US" sz="850" dirty="0">
-              <a:solidFill>
-                <a:srgbClr val="000000"/>
-              </a:solidFill>
-              <a:latin typeface="Arial" pitchFamily="34" charset="0"/>
-              <a:ea typeface="Arial" pitchFamily="34" charset="-122"/>
-              <a:cs typeface="Arial" pitchFamily="34" charset="-120"/>
-            </a:endParaRPr>
-          </a:p>
-          <a:p>
-            <a:pPr algn="r"/>
-            <a:endParaRPr lang="en-US" sz="850" dirty="0">
-              <a:solidFill>
-                <a:srgbClr val="000000"/>
-              </a:solidFill>
-              <a:latin typeface="Arial" pitchFamily="34" charset="0"/>
-              <a:ea typeface="Arial" pitchFamily="34" charset="-122"/>
-              <a:cs typeface="Arial" pitchFamily="34" charset="-120"/>
-            </a:endParaRPr>
-          </a:p>
-          <a:p>
-            <a:pPr algn="r"/>
-            <a:r>
-              <a:rPr lang="en-US" sz="850" dirty="0">
-                <a:solidFill>
-                  <a:srgbClr val="000000"/>
-                </a:solidFill>
-                <a:latin typeface="Arial" pitchFamily="34" charset="0"/>
-                <a:ea typeface="Arial" pitchFamily="34" charset="-122"/>
-                <a:cs typeface="Arial" pitchFamily="34" charset="-120"/>
-              </a:rPr>
-              <a:t>18/03/2026</a:t>
-            </a:r>
             <a:endParaRPr lang="en-US" sz="850" dirty="0"/>
           </a:p>
           <a:p>
@@ -18745,13 +18582,13 @@
           <p:nvPr>
             <p:extLst>
               <p:ext uri="{D42A27DB-BD31-4B8C-83A1-F6EECF244321}">
-                <p14:modId xmlns:p14="http://schemas.microsoft.com/office/powerpoint/2010/main" val="1579011935"/>
+                <p14:modId xmlns:p14="http://schemas.microsoft.com/office/powerpoint/2010/main" val="1691816354"/>
               </p:ext>
             </p:extLst>
           </p:nvPr>
         </p:nvGraphicFramePr>
         <p:xfrm>
-          <a:off x="194767" y="649224"/>
+          <a:off x="194767" y="593365"/>
           <a:ext cx="8686800" cy="4023360"/>
         </p:xfrm>
         <a:graphic>
@@ -20504,8 +20341,12 @@
                 <a:ea typeface="Arial" pitchFamily="34" charset="-122"/>
                 <a:cs typeface="Arial" pitchFamily="34" charset="-120"/>
               </a:rPr>
-              <a:t>18/03/2026</a:t>
-            </a:r>
+              <a:t>17/04/2026</a:t>
+            </a:r>
+            <a:endParaRPr lang="en-US" sz="850" dirty="0"/>
+          </a:p>
+          <a:p>
+            <a:pPr algn="r"/>
             <a:endParaRPr lang="en-US" sz="850" dirty="0"/>
           </a:p>
           <a:p>
@@ -20584,7 +20425,7 @@
               <a:buChar char="•"/>
             </a:pPr>
             <a:r>
-              <a:rPr lang="en-US" sz="1300" dirty="0">
+              <a:rPr lang="en-US" sz="1400" dirty="0">
                 <a:solidFill>
                   <a:srgbClr val="1F1F1F"/>
                 </a:solidFill>
@@ -20594,7 +20435,7 @@
               </a:rPr>
               <a:t>No Context-Aware Reasoning: Static rule engines like CDK-Nag match patterns against fixed rule sets. They cannot detect compound vulnerabilities — cases where two individually safe configurations become dangerous when combined.</a:t>
             </a:r>
-            <a:endParaRPr lang="en-US" sz="1300" dirty="0"/>
+            <a:endParaRPr lang="en-US" sz="1400" dirty="0"/>
           </a:p>
           <a:p>
             <a:pPr marL="342900" indent="-342900">
@@ -20605,7 +20446,7 @@
               <a:buChar char="•"/>
             </a:pPr>
             <a:r>
-              <a:rPr lang="en-US" sz="1300" dirty="0">
+              <a:rPr lang="en-US" sz="1400" dirty="0">
                 <a:solidFill>
                   <a:srgbClr val="1F1F1F"/>
                 </a:solidFill>
@@ -20615,7 +20456,7 @@
               </a:rPr>
               <a:t>Excessive False Positives (15–30%): Rule packs flag configurations that are valid in the organisation's specific context, generating alert fatigue and eroding developer trust.</a:t>
             </a:r>
-            <a:endParaRPr lang="en-US" sz="1300" dirty="0"/>
+            <a:endParaRPr lang="en-US" sz="1400" dirty="0"/>
           </a:p>
           <a:p>
             <a:pPr marL="342900" indent="-342900">
@@ -20626,7 +20467,7 @@
               <a:buChar char="•"/>
             </a:pPr>
             <a:r>
-              <a:rPr lang="en-US" sz="1300" dirty="0">
+              <a:rPr lang="en-US" sz="1400" dirty="0">
                 <a:solidFill>
                   <a:srgbClr val="1F1F1F"/>
                 </a:solidFill>
@@ -20636,7 +20477,7 @@
               </a:rPr>
               <a:t>Stale Security Knowledge: Rule packs updated infrequently. LLMs trained before new AWS advisories miss newly disclosed vulnerabilities and deprecated service recommendations without RAG grounding.</a:t>
             </a:r>
-            <a:endParaRPr lang="en-US" sz="1300" dirty="0"/>
+            <a:endParaRPr lang="en-US" sz="1400" dirty="0"/>
           </a:p>
           <a:p>
             <a:pPr marL="342900" indent="-342900">
@@ -20647,7 +20488,7 @@
               <a:buChar char="•"/>
             </a:pPr>
             <a:r>
-              <a:rPr lang="en-US" sz="1300" dirty="0">
+              <a:rPr lang="en-US" sz="1400" dirty="0">
                 <a:solidFill>
                   <a:srgbClr val="1F1F1F"/>
                 </a:solidFill>
@@ -20657,7 +20498,7 @@
               </a:rPr>
               <a:t>No Automated Remediation Guidance: Existing scanners identify issues but leave developers to research and apply fixes manually — increasing Mean Time to Remediation (MTTR).</a:t>
             </a:r>
-            <a:endParaRPr lang="en-US" sz="1300" dirty="0"/>
+            <a:endParaRPr lang="en-US" sz="1400" dirty="0"/>
           </a:p>
           <a:p>
             <a:pPr marL="342900" indent="-342900">
@@ -20668,7 +20509,7 @@
               <a:buChar char="•"/>
             </a:pPr>
             <a:r>
-              <a:rPr lang="en-US" sz="1300" dirty="0">
+              <a:rPr lang="en-US" sz="1400" dirty="0">
                 <a:solidFill>
                   <a:srgbClr val="1F1F1F"/>
                 </a:solidFill>
@@ -20678,7 +20519,7 @@
               </a:rPr>
               <a:t>Poor Scalability to Complex Templates: Conditional logic, parameterised resources, and cross-stack references cause both rule-based tools and zero-shot LLMs to produce redundant or missed alerts.</a:t>
             </a:r>
-            <a:endParaRPr lang="en-US" sz="1300" dirty="0"/>
+            <a:endParaRPr lang="en-US" sz="1400" dirty="0"/>
           </a:p>
           <a:p>
             <a:pPr marL="342900" indent="-342900">
@@ -20689,7 +20530,7 @@
               <a:buChar char="•"/>
             </a:pPr>
             <a:r>
-              <a:rPr lang="en-US" sz="1300" dirty="0">
+              <a:rPr lang="en-US" sz="1400" dirty="0">
                 <a:solidFill>
                   <a:srgbClr val="1F1F1F"/>
                 </a:solidFill>
@@ -20699,7 +20540,7 @@
               </a:rPr>
               <a:t>Weak CI/CD Integration: Most tools lack native pipeline hooks. Reports are not developer-friendly and difficult to feed into issue-tracking workflows automatically.</a:t>
             </a:r>
-            <a:endParaRPr lang="en-US" sz="1300" dirty="0"/>
+            <a:endParaRPr lang="en-US" sz="1400" dirty="0"/>
           </a:p>
         </p:txBody>
       </p:sp>
@@ -20768,7 +20609,7 @@
         </p:nvSpPr>
         <p:spPr>
           <a:xfrm>
-            <a:off x="194767" y="54864"/>
+            <a:off x="234543" y="73152"/>
             <a:ext cx="6583680" cy="594360"/>
           </a:xfrm>
           <a:prstGeom prst="rect">
@@ -20894,8 +20735,12 @@
                 <a:ea typeface="Arial" pitchFamily="34" charset="-122"/>
                 <a:cs typeface="Arial" pitchFamily="34" charset="-120"/>
               </a:rPr>
-              <a:t>18/03/2026</a:t>
-            </a:r>
+              <a:t>17/04/2026</a:t>
+            </a:r>
+            <a:endParaRPr lang="en-US" sz="850" dirty="0"/>
+          </a:p>
+          <a:p>
+            <a:pPr algn="r"/>
             <a:endParaRPr lang="en-US" sz="850" dirty="0"/>
           </a:p>
           <a:p>
@@ -20974,7 +20819,7 @@
               <a:buChar char="•"/>
             </a:pPr>
             <a:r>
-              <a:rPr lang="en-US" sz="1300" dirty="0">
+              <a:rPr lang="en-US" sz="1400" dirty="0">
                 <a:solidFill>
                   <a:srgbClr val="1F1F1F"/>
                 </a:solidFill>
@@ -20984,7 +20829,7 @@
               </a:rPr>
               <a:t>Complexity of Cloud Infrastructure: As organisations rapidly adopt IaC, cloud environments are too complex to manage manually — leading to frequent misconfigurations such as unencrypted databases or open access ports.</a:t>
             </a:r>
-            <a:endParaRPr lang="en-US" sz="1300" dirty="0"/>
+            <a:endParaRPr lang="en-US" sz="1400" dirty="0"/>
           </a:p>
           <a:p>
             <a:pPr marL="342900" indent="-342900">
@@ -20995,7 +20840,7 @@
               <a:buChar char="•"/>
             </a:pPr>
             <a:r>
-              <a:rPr lang="en-US" sz="1300" dirty="0">
+              <a:rPr lang="en-US" sz="1400" dirty="0">
                 <a:solidFill>
                   <a:srgbClr val="1F1F1F"/>
                 </a:solidFill>
@@ -21005,7 +20850,7 @@
               </a:rPr>
               <a:t>Failure of Traditional Tools: Existing security tools operate on rigid rules. They are like "spellcheckers" — they catch simple typos but fail to understand the context, missing subtle, interdependent vulnerabilities.</a:t>
             </a:r>
-            <a:endParaRPr lang="en-US" sz="1300" dirty="0"/>
+            <a:endParaRPr lang="en-US" sz="1400" dirty="0"/>
           </a:p>
           <a:p>
             <a:pPr marL="342900" indent="-342900">
@@ -21016,7 +20861,7 @@
               <a:buChar char="•"/>
             </a:pPr>
             <a:r>
-              <a:rPr lang="en-US" sz="1300" dirty="0">
+              <a:rPr lang="en-US" sz="1400" dirty="0">
                 <a:solidFill>
                   <a:srgbClr val="1F1F1F"/>
                 </a:solidFill>
@@ -21026,7 +20871,7 @@
               </a:rPr>
               <a:t>High False Positives: Because current tools lack semantic understanding, they often flag safe configurations as dangerous. This overwhelms developers with useless alerts and causes "alert fatigue".</a:t>
             </a:r>
-            <a:endParaRPr lang="en-US" sz="1300" dirty="0"/>
+            <a:endParaRPr lang="en-US" sz="1400" dirty="0"/>
           </a:p>
           <a:p>
             <a:pPr marL="342900" indent="-342900">
@@ -21037,7 +20882,7 @@
               <a:buChar char="•"/>
             </a:pPr>
             <a:r>
-              <a:rPr lang="en-US" sz="1300" dirty="0">
+              <a:rPr lang="en-US" sz="1400" dirty="0">
                 <a:solidFill>
                   <a:srgbClr val="1F1F1F"/>
                 </a:solidFill>
@@ -21047,7 +20892,7 @@
               </a:rPr>
               <a:t>Lack of Automated Remediation: Current tools only find the problems but do not provide actionable fixes. This forces developers to manually research and patch security issues, which is slow and error-prone.</a:t>
             </a:r>
-            <a:endParaRPr lang="en-US" sz="1300" dirty="0"/>
+            <a:endParaRPr lang="en-US" sz="1400" dirty="0"/>
           </a:p>
           <a:p>
             <a:pPr marL="342900" indent="-342900">
@@ -21058,7 +20903,7 @@
               <a:buChar char="•"/>
             </a:pPr>
             <a:r>
-              <a:rPr lang="en-US" sz="1300" dirty="0">
+              <a:rPr lang="en-US" sz="1400" dirty="0">
                 <a:solidFill>
                   <a:srgbClr val="1F1F1F"/>
                 </a:solidFill>
@@ -21068,7 +20913,7 @@
               </a:rPr>
               <a:t>Knowledge Staleness: LLMs and rule-based tools do not automatically incorporate newly released AWS security advisories or updated CIS Benchmark requirements, causing missed detections on emerging threats.</a:t>
             </a:r>
-            <a:endParaRPr lang="en-US" sz="1300" dirty="0"/>
+            <a:endParaRPr lang="en-US" sz="1400" dirty="0"/>
           </a:p>
         </p:txBody>
       </p:sp>
